--- a/HMZ-rt.pptx
+++ b/HMZ-rt.pptx
@@ -128,6 +128,11 @@
       </a:defRPr>
     </a:lvl9pPr>
   </p:defaultTextStyle>
+  <p:extLst>
+    <p:ext uri="{EFAFB233-063F-42B5-8137-9DF3F51BA10A}">
+      <p15:sldGuideLst xmlns:p15="http://schemas.microsoft.com/office/powerpoint/2012/main"/>
+    </p:ext>
+  </p:extLst>
 </p:presentation>
 </file>
 
@@ -188,7 +193,7 @@
           <a:noFill/>
           <a:extLst>
             <a:ext uri="{909E8E84-426E-40dd-AFC4-6F175D3DCCD1}">
-              <a14:hiddenFill xmlns:a14="http://schemas.microsoft.com/office/drawing/2010/main" xmlns="">
+              <a14:hiddenFill xmlns="" xmlns:a14="http://schemas.microsoft.com/office/drawing/2010/main">
                 <a:solidFill>
                   <a:srgbClr val="FFFFFF"/>
                 </a:solidFill>
@@ -247,7 +252,7 @@
             </a:ln>
             <a:extLst>
               <a:ext uri="{91240B29-F687-4f45-9708-019B960494DF}">
-                <a14:hiddenLine xmlns:a14="http://schemas.microsoft.com/office/drawing/2010/main" xmlns="" w="9525">
+                <a14:hiddenLine xmlns="" xmlns:a14="http://schemas.microsoft.com/office/drawing/2010/main" w="9525">
                   <a:solidFill>
                     <a:srgbClr val="000000"/>
                   </a:solidFill>
@@ -337,7 +342,7 @@
             </a:ln>
             <a:extLst>
               <a:ext uri="{91240B29-F687-4f45-9708-019B960494DF}">
-                <a14:hiddenLine xmlns:a14="http://schemas.microsoft.com/office/drawing/2010/main" xmlns="" w="9525">
+                <a14:hiddenLine xmlns="" xmlns:a14="http://schemas.microsoft.com/office/drawing/2010/main" w="9525">
                   <a:solidFill>
                     <a:srgbClr val="000000"/>
                   </a:solidFill>
@@ -427,7 +432,7 @@
             </a:ln>
             <a:extLst>
               <a:ext uri="{91240B29-F687-4f45-9708-019B960494DF}">
-                <a14:hiddenLine xmlns:a14="http://schemas.microsoft.com/office/drawing/2010/main" xmlns="" w="9525">
+                <a14:hiddenLine xmlns="" xmlns:a14="http://schemas.microsoft.com/office/drawing/2010/main" w="9525">
                   <a:solidFill>
                     <a:srgbClr val="000000"/>
                   </a:solidFill>
@@ -461,7 +466,7 @@
             </a:ln>
             <a:extLst>
               <a:ext uri="{91240B29-F687-4f45-9708-019B960494DF}">
-                <a14:hiddenLine xmlns:a14="http://schemas.microsoft.com/office/drawing/2010/main" xmlns="" w="9525">
+                <a14:hiddenLine xmlns="" xmlns:a14="http://schemas.microsoft.com/office/drawing/2010/main" w="9525">
                   <a:solidFill>
                     <a:srgbClr val="000000"/>
                   </a:solidFill>
@@ -551,7 +556,7 @@
             </a:ln>
             <a:extLst>
               <a:ext uri="{91240B29-F687-4f45-9708-019B960494DF}">
-                <a14:hiddenLine xmlns:a14="http://schemas.microsoft.com/office/drawing/2010/main" xmlns="" w="9525">
+                <a14:hiddenLine xmlns="" xmlns:a14="http://schemas.microsoft.com/office/drawing/2010/main" w="9525">
                   <a:solidFill>
                     <a:srgbClr val="000000"/>
                   </a:solidFill>
@@ -613,7 +618,7 @@
             </a:ln>
             <a:extLst>
               <a:ext uri="{91240B29-F687-4f45-9708-019B960494DF}">
-                <a14:hiddenLine xmlns:a14="http://schemas.microsoft.com/office/drawing/2010/main" xmlns="" w="9525">
+                <a14:hiddenLine xmlns="" xmlns:a14="http://schemas.microsoft.com/office/drawing/2010/main" w="9525">
                   <a:solidFill>
                     <a:srgbClr val="000000"/>
                   </a:solidFill>
@@ -675,7 +680,7 @@
             </a:ln>
             <a:extLst>
               <a:ext uri="{91240B29-F687-4f45-9708-019B960494DF}">
-                <a14:hiddenLine xmlns:a14="http://schemas.microsoft.com/office/drawing/2010/main" xmlns="" w="9525">
+                <a14:hiddenLine xmlns="" xmlns:a14="http://schemas.microsoft.com/office/drawing/2010/main" w="9525">
                   <a:solidFill>
                     <a:srgbClr val="000000"/>
                   </a:solidFill>
@@ -765,7 +770,7 @@
             </a:ln>
             <a:extLst>
               <a:ext uri="{91240B29-F687-4f45-9708-019B960494DF}">
-                <a14:hiddenLine xmlns:a14="http://schemas.microsoft.com/office/drawing/2010/main" xmlns="" w="9525">
+                <a14:hiddenLine xmlns="" xmlns:a14="http://schemas.microsoft.com/office/drawing/2010/main" w="9525">
                   <a:solidFill>
                     <a:srgbClr val="000000"/>
                   </a:solidFill>
@@ -827,7 +832,7 @@
             </a:ln>
             <a:extLst>
               <a:ext uri="{91240B29-F687-4f45-9708-019B960494DF}">
-                <a14:hiddenLine xmlns:a14="http://schemas.microsoft.com/office/drawing/2010/main" xmlns="" w="9525">
+                <a14:hiddenLine xmlns="" xmlns:a14="http://schemas.microsoft.com/office/drawing/2010/main" w="9525">
                   <a:solidFill>
                     <a:srgbClr val="000000"/>
                   </a:solidFill>
@@ -889,7 +894,7 @@
             </a:ln>
             <a:extLst>
               <a:ext uri="{91240B29-F687-4f45-9708-019B960494DF}">
-                <a14:hiddenLine xmlns:a14="http://schemas.microsoft.com/office/drawing/2010/main" xmlns="" w="9525">
+                <a14:hiddenLine xmlns="" xmlns:a14="http://schemas.microsoft.com/office/drawing/2010/main" w="9525">
                   <a:solidFill>
                     <a:srgbClr val="000000"/>
                   </a:solidFill>
@@ -979,7 +984,7 @@
             </a:ln>
             <a:extLst>
               <a:ext uri="{91240B29-F687-4f45-9708-019B960494DF}">
-                <a14:hiddenLine xmlns:a14="http://schemas.microsoft.com/office/drawing/2010/main" xmlns="" w="9525">
+                <a14:hiddenLine xmlns="" xmlns:a14="http://schemas.microsoft.com/office/drawing/2010/main" w="9525">
                   <a:solidFill>
                     <a:srgbClr val="000000"/>
                   </a:solidFill>
@@ -1069,7 +1074,7 @@
             </a:ln>
             <a:extLst>
               <a:ext uri="{91240B29-F687-4f45-9708-019B960494DF}">
-                <a14:hiddenLine xmlns:a14="http://schemas.microsoft.com/office/drawing/2010/main" xmlns="" w="9525">
+                <a14:hiddenLine xmlns="" xmlns:a14="http://schemas.microsoft.com/office/drawing/2010/main" w="9525">
                   <a:solidFill>
                     <a:srgbClr val="000000"/>
                   </a:solidFill>
@@ -1131,7 +1136,7 @@
             </a:ln>
             <a:extLst>
               <a:ext uri="{91240B29-F687-4f45-9708-019B960494DF}">
-                <a14:hiddenLine xmlns:a14="http://schemas.microsoft.com/office/drawing/2010/main" xmlns="" w="9525">
+                <a14:hiddenLine xmlns="" xmlns:a14="http://schemas.microsoft.com/office/drawing/2010/main" w="9525">
                   <a:solidFill>
                     <a:srgbClr val="000000"/>
                   </a:solidFill>
@@ -1241,7 +1246,7 @@
             </a:ln>
             <a:extLst>
               <a:ext uri="{91240B29-F687-4f45-9708-019B960494DF}">
-                <a14:hiddenLine xmlns:a14="http://schemas.microsoft.com/office/drawing/2010/main" xmlns="" w="9525">
+                <a14:hiddenLine xmlns="" xmlns:a14="http://schemas.microsoft.com/office/drawing/2010/main" w="9525">
                   <a:solidFill>
                     <a:srgbClr val="000000"/>
                   </a:solidFill>
@@ -1303,7 +1308,7 @@
             </a:ln>
             <a:extLst>
               <a:ext uri="{91240B29-F687-4f45-9708-019B960494DF}">
-                <a14:hiddenLine xmlns:a14="http://schemas.microsoft.com/office/drawing/2010/main" xmlns="" w="9525">
+                <a14:hiddenLine xmlns="" xmlns:a14="http://schemas.microsoft.com/office/drawing/2010/main" w="9525">
                   <a:solidFill>
                     <a:srgbClr val="000000"/>
                   </a:solidFill>
@@ -1393,7 +1398,7 @@
             </a:ln>
             <a:extLst>
               <a:ext uri="{91240B29-F687-4f45-9708-019B960494DF}">
-                <a14:hiddenLine xmlns:a14="http://schemas.microsoft.com/office/drawing/2010/main" xmlns="" w="9525">
+                <a14:hiddenLine xmlns="" xmlns:a14="http://schemas.microsoft.com/office/drawing/2010/main" w="9525">
                   <a:solidFill>
                     <a:srgbClr val="000000"/>
                   </a:solidFill>
@@ -1483,7 +1488,7 @@
             </a:ln>
             <a:extLst>
               <a:ext uri="{91240B29-F687-4f45-9708-019B960494DF}">
-                <a14:hiddenLine xmlns:a14="http://schemas.microsoft.com/office/drawing/2010/main" xmlns="" w="9525">
+                <a14:hiddenLine xmlns="" xmlns:a14="http://schemas.microsoft.com/office/drawing/2010/main" w="9525">
                   <a:solidFill>
                     <a:srgbClr val="000000"/>
                   </a:solidFill>
@@ -1545,7 +1550,7 @@
             </a:ln>
             <a:extLst>
               <a:ext uri="{91240B29-F687-4f45-9708-019B960494DF}">
-                <a14:hiddenLine xmlns:a14="http://schemas.microsoft.com/office/drawing/2010/main" xmlns="" w="9525">
+                <a14:hiddenLine xmlns="" xmlns:a14="http://schemas.microsoft.com/office/drawing/2010/main" w="9525">
                   <a:solidFill>
                     <a:srgbClr val="000000"/>
                   </a:solidFill>
@@ -1635,7 +1640,7 @@
             </a:ln>
             <a:extLst>
               <a:ext uri="{91240B29-F687-4f45-9708-019B960494DF}">
-                <a14:hiddenLine xmlns:a14="http://schemas.microsoft.com/office/drawing/2010/main" xmlns="" w="9525">
+                <a14:hiddenLine xmlns="" xmlns:a14="http://schemas.microsoft.com/office/drawing/2010/main" w="9525">
                   <a:solidFill>
                     <a:srgbClr val="000000"/>
                   </a:solidFill>
@@ -1725,7 +1730,7 @@
             </a:ln>
             <a:extLst>
               <a:ext uri="{91240B29-F687-4f45-9708-019B960494DF}">
-                <a14:hiddenLine xmlns:a14="http://schemas.microsoft.com/office/drawing/2010/main" xmlns="" w="9525">
+                <a14:hiddenLine xmlns="" xmlns:a14="http://schemas.microsoft.com/office/drawing/2010/main" w="9525">
                   <a:solidFill>
                     <a:srgbClr val="000000"/>
                   </a:solidFill>
@@ -1781,7 +1786,7 @@
             </a:ln>
             <a:extLst>
               <a:ext uri="{91240B29-F687-4f45-9708-019B960494DF}">
-                <a14:hiddenLine xmlns:a14="http://schemas.microsoft.com/office/drawing/2010/main" xmlns="" w="9525">
+                <a14:hiddenLine xmlns="" xmlns:a14="http://schemas.microsoft.com/office/drawing/2010/main" w="9525">
                   <a:solidFill>
                     <a:srgbClr val="000000"/>
                   </a:solidFill>
@@ -1871,7 +1876,7 @@
             </a:ln>
             <a:extLst>
               <a:ext uri="{91240B29-F687-4f45-9708-019B960494DF}">
-                <a14:hiddenLine xmlns:a14="http://schemas.microsoft.com/office/drawing/2010/main" xmlns="" w="9525">
+                <a14:hiddenLine xmlns="" xmlns:a14="http://schemas.microsoft.com/office/drawing/2010/main" w="9525">
                   <a:solidFill>
                     <a:srgbClr val="000000"/>
                   </a:solidFill>
@@ -1927,7 +1932,7 @@
             </a:ln>
             <a:extLst>
               <a:ext uri="{91240B29-F687-4f45-9708-019B960494DF}">
-                <a14:hiddenLine xmlns:a14="http://schemas.microsoft.com/office/drawing/2010/main" xmlns="" w="9525">
+                <a14:hiddenLine xmlns="" xmlns:a14="http://schemas.microsoft.com/office/drawing/2010/main" w="9525">
                   <a:solidFill>
                     <a:srgbClr val="000000"/>
                   </a:solidFill>
@@ -2017,7 +2022,7 @@
             </a:ln>
             <a:extLst>
               <a:ext uri="{91240B29-F687-4f45-9708-019B960494DF}">
-                <a14:hiddenLine xmlns:a14="http://schemas.microsoft.com/office/drawing/2010/main" xmlns="" w="9525">
+                <a14:hiddenLine xmlns="" xmlns:a14="http://schemas.microsoft.com/office/drawing/2010/main" w="9525">
                   <a:solidFill>
                     <a:srgbClr val="000000"/>
                   </a:solidFill>
@@ -2085,7 +2090,7 @@
             </a:ln>
             <a:extLst>
               <a:ext uri="{91240B29-F687-4f45-9708-019B960494DF}">
-                <a14:hiddenLine xmlns:a14="http://schemas.microsoft.com/office/drawing/2010/main" xmlns="" w="9525">
+                <a14:hiddenLine xmlns="" xmlns:a14="http://schemas.microsoft.com/office/drawing/2010/main" w="9525">
                   <a:solidFill>
                     <a:srgbClr val="000000"/>
                   </a:solidFill>
@@ -2175,7 +2180,7 @@
             </a:ln>
             <a:extLst>
               <a:ext uri="{91240B29-F687-4f45-9708-019B960494DF}">
-                <a14:hiddenLine xmlns:a14="http://schemas.microsoft.com/office/drawing/2010/main" xmlns="" w="9525">
+                <a14:hiddenLine xmlns="" xmlns:a14="http://schemas.microsoft.com/office/drawing/2010/main" w="9525">
                   <a:solidFill>
                     <a:srgbClr val="000000"/>
                   </a:solidFill>
@@ -2243,7 +2248,7 @@
             </a:ln>
             <a:extLst>
               <a:ext uri="{91240B29-F687-4f45-9708-019B960494DF}">
-                <a14:hiddenLine xmlns:a14="http://schemas.microsoft.com/office/drawing/2010/main" xmlns="" w="9525">
+                <a14:hiddenLine xmlns="" xmlns:a14="http://schemas.microsoft.com/office/drawing/2010/main" w="9525">
                   <a:solidFill>
                     <a:srgbClr val="000000"/>
                   </a:solidFill>
@@ -2333,7 +2338,7 @@
             </a:ln>
             <a:extLst>
               <a:ext uri="{91240B29-F687-4f45-9708-019B960494DF}">
-                <a14:hiddenLine xmlns:a14="http://schemas.microsoft.com/office/drawing/2010/main" xmlns="" w="9525">
+                <a14:hiddenLine xmlns="" xmlns:a14="http://schemas.microsoft.com/office/drawing/2010/main" w="9525">
                   <a:solidFill>
                     <a:srgbClr val="000000"/>
                   </a:solidFill>
@@ -2367,7 +2372,7 @@
             </a:ln>
             <a:extLst>
               <a:ext uri="{91240B29-F687-4f45-9708-019B960494DF}">
-                <a14:hiddenLine xmlns:a14="http://schemas.microsoft.com/office/drawing/2010/main" xmlns="" w="9525">
+                <a14:hiddenLine xmlns="" xmlns:a14="http://schemas.microsoft.com/office/drawing/2010/main" w="9525">
                   <a:solidFill>
                     <a:srgbClr val="000000"/>
                   </a:solidFill>
@@ -2457,7 +2462,7 @@
             </a:ln>
             <a:extLst>
               <a:ext uri="{91240B29-F687-4f45-9708-019B960494DF}">
-                <a14:hiddenLine xmlns:a14="http://schemas.microsoft.com/office/drawing/2010/main" xmlns="" w="9525">
+                <a14:hiddenLine xmlns="" xmlns:a14="http://schemas.microsoft.com/office/drawing/2010/main" w="9525">
                   <a:solidFill>
                     <a:srgbClr val="000000"/>
                   </a:solidFill>
@@ -2519,7 +2524,7 @@
             </a:ln>
             <a:extLst>
               <a:ext uri="{91240B29-F687-4f45-9708-019B960494DF}">
-                <a14:hiddenLine xmlns:a14="http://schemas.microsoft.com/office/drawing/2010/main" xmlns="" w="9525">
+                <a14:hiddenLine xmlns="" xmlns:a14="http://schemas.microsoft.com/office/drawing/2010/main" w="9525">
                   <a:solidFill>
                     <a:srgbClr val="000000"/>
                   </a:solidFill>
@@ -2581,7 +2586,7 @@
             </a:ln>
             <a:extLst>
               <a:ext uri="{91240B29-F687-4f45-9708-019B960494DF}">
-                <a14:hiddenLine xmlns:a14="http://schemas.microsoft.com/office/drawing/2010/main" xmlns="" w="9525">
+                <a14:hiddenLine xmlns="" xmlns:a14="http://schemas.microsoft.com/office/drawing/2010/main" w="9525">
                   <a:solidFill>
                     <a:srgbClr val="000000"/>
                   </a:solidFill>
@@ -2671,7 +2676,7 @@
             </a:ln>
             <a:extLst>
               <a:ext uri="{91240B29-F687-4f45-9708-019B960494DF}">
-                <a14:hiddenLine xmlns:a14="http://schemas.microsoft.com/office/drawing/2010/main" xmlns="" w="9525">
+                <a14:hiddenLine xmlns="" xmlns:a14="http://schemas.microsoft.com/office/drawing/2010/main" w="9525">
                   <a:solidFill>
                     <a:srgbClr val="000000"/>
                   </a:solidFill>
@@ -2739,7 +2744,7 @@
             </a:ln>
             <a:extLst>
               <a:ext uri="{91240B29-F687-4f45-9708-019B960494DF}">
-                <a14:hiddenLine xmlns:a14="http://schemas.microsoft.com/office/drawing/2010/main" xmlns="" w="9525">
+                <a14:hiddenLine xmlns="" xmlns:a14="http://schemas.microsoft.com/office/drawing/2010/main" w="9525">
                   <a:solidFill>
                     <a:srgbClr val="000000"/>
                   </a:solidFill>
@@ -2801,7 +2806,7 @@
             </a:ln>
             <a:extLst>
               <a:ext uri="{91240B29-F687-4f45-9708-019B960494DF}">
-                <a14:hiddenLine xmlns:a14="http://schemas.microsoft.com/office/drawing/2010/main" xmlns="" w="9525">
+                <a14:hiddenLine xmlns="" xmlns:a14="http://schemas.microsoft.com/office/drawing/2010/main" w="9525">
                   <a:solidFill>
                     <a:srgbClr val="000000"/>
                   </a:solidFill>
@@ -2891,7 +2896,7 @@
             </a:ln>
             <a:extLst>
               <a:ext uri="{91240B29-F687-4f45-9708-019B960494DF}">
-                <a14:hiddenLine xmlns:a14="http://schemas.microsoft.com/office/drawing/2010/main" xmlns="" w="9525">
+                <a14:hiddenLine xmlns="" xmlns:a14="http://schemas.microsoft.com/office/drawing/2010/main" w="9525">
                   <a:solidFill>
                     <a:srgbClr val="000000"/>
                   </a:solidFill>
@@ -2953,7 +2958,7 @@
             </a:ln>
             <a:extLst>
               <a:ext uri="{91240B29-F687-4f45-9708-019B960494DF}">
-                <a14:hiddenLine xmlns:a14="http://schemas.microsoft.com/office/drawing/2010/main" xmlns="" w="9525">
+                <a14:hiddenLine xmlns="" xmlns:a14="http://schemas.microsoft.com/office/drawing/2010/main" w="9525">
                   <a:solidFill>
                     <a:srgbClr val="000000"/>
                   </a:solidFill>
@@ -3043,7 +3048,7 @@
             </a:ln>
             <a:extLst>
               <a:ext uri="{91240B29-F687-4f45-9708-019B960494DF}">
-                <a14:hiddenLine xmlns:a14="http://schemas.microsoft.com/office/drawing/2010/main" xmlns="" w="9525">
+                <a14:hiddenLine xmlns="" xmlns:a14="http://schemas.microsoft.com/office/drawing/2010/main" w="9525">
                   <a:solidFill>
                     <a:srgbClr val="000000"/>
                   </a:solidFill>
@@ -3105,7 +3110,7 @@
             </a:ln>
             <a:extLst>
               <a:ext uri="{91240B29-F687-4f45-9708-019B960494DF}">
-                <a14:hiddenLine xmlns:a14="http://schemas.microsoft.com/office/drawing/2010/main" xmlns="" w="9525">
+                <a14:hiddenLine xmlns="" xmlns:a14="http://schemas.microsoft.com/office/drawing/2010/main" w="9525">
                   <a:solidFill>
                     <a:srgbClr val="000000"/>
                   </a:solidFill>
@@ -3195,7 +3200,7 @@
             </a:ln>
             <a:extLst>
               <a:ext uri="{91240B29-F687-4f45-9708-019B960494DF}">
-                <a14:hiddenLine xmlns:a14="http://schemas.microsoft.com/office/drawing/2010/main" xmlns="" w="9525">
+                <a14:hiddenLine xmlns="" xmlns:a14="http://schemas.microsoft.com/office/drawing/2010/main" w="9525">
                   <a:solidFill>
                     <a:srgbClr val="000000"/>
                   </a:solidFill>
@@ -3229,7 +3234,7 @@
             </a:ln>
             <a:extLst>
               <a:ext uri="{91240B29-F687-4f45-9708-019B960494DF}">
-                <a14:hiddenLine xmlns:a14="http://schemas.microsoft.com/office/drawing/2010/main" xmlns="" w="9525">
+                <a14:hiddenLine xmlns="" xmlns:a14="http://schemas.microsoft.com/office/drawing/2010/main" w="9525">
                   <a:solidFill>
                     <a:srgbClr val="000000"/>
                   </a:solidFill>
@@ -3294,7 +3299,7 @@
             </a:ln>
             <a:extLst>
               <a:ext uri="{91240B29-F687-4f45-9708-019B960494DF}">
-                <a14:hiddenLine xmlns:a14="http://schemas.microsoft.com/office/drawing/2010/main" xmlns="" w="9525">
+                <a14:hiddenLine xmlns="" xmlns:a14="http://schemas.microsoft.com/office/drawing/2010/main" w="9525">
                   <a:solidFill>
                     <a:srgbClr val="000000"/>
                   </a:solidFill>
@@ -3384,7 +3389,7 @@
             </a:ln>
             <a:extLst>
               <a:ext uri="{91240B29-F687-4f45-9708-019B960494DF}">
-                <a14:hiddenLine xmlns:a14="http://schemas.microsoft.com/office/drawing/2010/main" xmlns="" w="9525">
+                <a14:hiddenLine xmlns="" xmlns:a14="http://schemas.microsoft.com/office/drawing/2010/main" w="9525">
                   <a:solidFill>
                     <a:srgbClr val="000000"/>
                   </a:solidFill>
@@ -3446,7 +3451,7 @@
             </a:ln>
             <a:extLst>
               <a:ext uri="{91240B29-F687-4f45-9708-019B960494DF}">
-                <a14:hiddenLine xmlns:a14="http://schemas.microsoft.com/office/drawing/2010/main" xmlns="" w="9525">
+                <a14:hiddenLine xmlns="" xmlns:a14="http://schemas.microsoft.com/office/drawing/2010/main" w="9525">
                   <a:solidFill>
                     <a:srgbClr val="000000"/>
                   </a:solidFill>
@@ -3536,7 +3541,7 @@
             </a:ln>
             <a:extLst>
               <a:ext uri="{91240B29-F687-4f45-9708-019B960494DF}">
-                <a14:hiddenLine xmlns:a14="http://schemas.microsoft.com/office/drawing/2010/main" xmlns="" w="9525">
+                <a14:hiddenLine xmlns="" xmlns:a14="http://schemas.microsoft.com/office/drawing/2010/main" w="9525">
                   <a:solidFill>
                     <a:srgbClr val="000000"/>
                   </a:solidFill>
@@ -3626,7 +3631,7 @@
             </a:ln>
             <a:extLst>
               <a:ext uri="{91240B29-F687-4f45-9708-019B960494DF}">
-                <a14:hiddenLine xmlns:a14="http://schemas.microsoft.com/office/drawing/2010/main" xmlns="" w="9525">
+                <a14:hiddenLine xmlns="" xmlns:a14="http://schemas.microsoft.com/office/drawing/2010/main" w="9525">
                   <a:solidFill>
                     <a:srgbClr val="000000"/>
                   </a:solidFill>
@@ -3691,7 +3696,7 @@
             </a:ln>
             <a:extLst>
               <a:ext uri="{91240B29-F687-4f45-9708-019B960494DF}">
-                <a14:hiddenLine xmlns:a14="http://schemas.microsoft.com/office/drawing/2010/main" xmlns="" w="9525">
+                <a14:hiddenLine xmlns="" xmlns:a14="http://schemas.microsoft.com/office/drawing/2010/main" w="9525">
                   <a:solidFill>
                     <a:srgbClr val="000000"/>
                   </a:solidFill>
@@ -3753,7 +3758,7 @@
             </a:ln>
             <a:extLst>
               <a:ext uri="{91240B29-F687-4f45-9708-019B960494DF}">
-                <a14:hiddenLine xmlns:a14="http://schemas.microsoft.com/office/drawing/2010/main" xmlns="" w="9525">
+                <a14:hiddenLine xmlns="" xmlns:a14="http://schemas.microsoft.com/office/drawing/2010/main" w="9525">
                   <a:solidFill>
                     <a:srgbClr val="000000"/>
                   </a:solidFill>
@@ -3843,7 +3848,7 @@
             </a:ln>
             <a:extLst>
               <a:ext uri="{91240B29-F687-4f45-9708-019B960494DF}">
-                <a14:hiddenLine xmlns:a14="http://schemas.microsoft.com/office/drawing/2010/main" xmlns="" w="9525">
+                <a14:hiddenLine xmlns="" xmlns:a14="http://schemas.microsoft.com/office/drawing/2010/main" w="9525">
                   <a:solidFill>
                     <a:srgbClr val="000000"/>
                   </a:solidFill>
@@ -3933,7 +3938,7 @@
             </a:ln>
             <a:extLst>
               <a:ext uri="{91240B29-F687-4f45-9708-019B960494DF}">
-                <a14:hiddenLine xmlns:a14="http://schemas.microsoft.com/office/drawing/2010/main" xmlns="" w="9525">
+                <a14:hiddenLine xmlns="" xmlns:a14="http://schemas.microsoft.com/office/drawing/2010/main" w="9525">
                   <a:solidFill>
                     <a:srgbClr val="000000"/>
                   </a:solidFill>
@@ -3995,7 +4000,7 @@
             </a:ln>
             <a:extLst>
               <a:ext uri="{91240B29-F687-4f45-9708-019B960494DF}">
-                <a14:hiddenLine xmlns:a14="http://schemas.microsoft.com/office/drawing/2010/main" xmlns="" w="9525">
+                <a14:hiddenLine xmlns="" xmlns:a14="http://schemas.microsoft.com/office/drawing/2010/main" w="9525">
                   <a:solidFill>
                     <a:srgbClr val="000000"/>
                   </a:solidFill>
@@ -4115,7 +4120,7 @@
             </a:ln>
             <a:extLst>
               <a:ext uri="{91240B29-F687-4f45-9708-019B960494DF}">
-                <a14:hiddenLine xmlns:a14="http://schemas.microsoft.com/office/drawing/2010/main" xmlns="" w="9525">
+                <a14:hiddenLine xmlns="" xmlns:a14="http://schemas.microsoft.com/office/drawing/2010/main" w="9525">
                   <a:solidFill>
                     <a:srgbClr val="000000"/>
                   </a:solidFill>
@@ -4183,7 +4188,7 @@
             </a:ln>
             <a:extLst>
               <a:ext uri="{91240B29-F687-4f45-9708-019B960494DF}">
-                <a14:hiddenLine xmlns:a14="http://schemas.microsoft.com/office/drawing/2010/main" xmlns="" w="9525">
+                <a14:hiddenLine xmlns="" xmlns:a14="http://schemas.microsoft.com/office/drawing/2010/main" w="9525">
                   <a:solidFill>
                     <a:srgbClr val="000000"/>
                   </a:solidFill>
@@ -4273,7 +4278,7 @@
             </a:ln>
             <a:extLst>
               <a:ext uri="{91240B29-F687-4f45-9708-019B960494DF}">
-                <a14:hiddenLine xmlns:a14="http://schemas.microsoft.com/office/drawing/2010/main" xmlns="" w="9525">
+                <a14:hiddenLine xmlns="" xmlns:a14="http://schemas.microsoft.com/office/drawing/2010/main" w="9525">
                   <a:solidFill>
                     <a:srgbClr val="000000"/>
                   </a:solidFill>
@@ -4481,13 +4486,13 @@
   <p:clrMapOvr>
     <a:masterClrMapping/>
   </p:clrMapOvr>
-  <mc:AlternateContent xmlns:mc="http://schemas.openxmlformats.org/markup-compatibility/2006">
-    <mc:Choice xmlns:p159="http://schemas.microsoft.com/office/powerpoint/2015/09/main" Requires="p159">
+  <mc:AlternateContent xmlns:mc="http://schemas.openxmlformats.org/markup-compatibility/2006" xmlns:p159="http://schemas.microsoft.com/office/powerpoint/2015/09/main">
+    <mc:Choice Requires="p159">
       <p:transition xmlns:p14="http://schemas.microsoft.com/office/powerpoint/2010/main" spd="slow" p14:dur="2000">
         <p159:morph option="byObject"/>
       </p:transition>
     </mc:Choice>
-    <mc:Fallback>
+    <mc:Fallback xmlns="">
       <p:transition spd="slow">
         <p:fade/>
       </p:transition>
@@ -4750,13 +4755,13 @@
   <p:clrMapOvr>
     <a:masterClrMapping/>
   </p:clrMapOvr>
-  <mc:AlternateContent xmlns:mc="http://schemas.openxmlformats.org/markup-compatibility/2006">
-    <mc:Choice xmlns:p159="http://schemas.microsoft.com/office/powerpoint/2015/09/main" Requires="p159">
+  <mc:AlternateContent xmlns:mc="http://schemas.openxmlformats.org/markup-compatibility/2006" xmlns:p159="http://schemas.microsoft.com/office/powerpoint/2015/09/main">
+    <mc:Choice Requires="p159">
       <p:transition xmlns:p14="http://schemas.microsoft.com/office/powerpoint/2010/main" spd="slow" p14:dur="2000">
         <p159:morph option="byObject"/>
       </p:transition>
     </mc:Choice>
-    <mc:Fallback>
+    <mc:Fallback xmlns="">
       <p:transition spd="slow">
         <p:fade/>
       </p:transition>
@@ -4958,13 +4963,13 @@
   <p:clrMapOvr>
     <a:masterClrMapping/>
   </p:clrMapOvr>
-  <mc:AlternateContent xmlns:mc="http://schemas.openxmlformats.org/markup-compatibility/2006">
-    <mc:Choice xmlns:p159="http://schemas.microsoft.com/office/powerpoint/2015/09/main" Requires="p159">
+  <mc:AlternateContent xmlns:mc="http://schemas.openxmlformats.org/markup-compatibility/2006" xmlns:p159="http://schemas.microsoft.com/office/powerpoint/2015/09/main">
+    <mc:Choice Requires="p159">
       <p:transition xmlns:p14="http://schemas.microsoft.com/office/powerpoint/2010/main" spd="slow" p14:dur="2000">
         <p159:morph option="byObject"/>
       </p:transition>
     </mc:Choice>
-    <mc:Fallback>
+    <mc:Fallback xmlns="">
       <p:transition spd="slow">
         <p:fade/>
       </p:transition>
@@ -5471,13 +5476,13 @@
   <p:clrMapOvr>
     <a:masterClrMapping/>
   </p:clrMapOvr>
-  <mc:AlternateContent xmlns:mc="http://schemas.openxmlformats.org/markup-compatibility/2006">
-    <mc:Choice xmlns:p159="http://schemas.microsoft.com/office/powerpoint/2015/09/main" Requires="p159">
+  <mc:AlternateContent xmlns:mc="http://schemas.openxmlformats.org/markup-compatibility/2006" xmlns:p159="http://schemas.microsoft.com/office/powerpoint/2015/09/main">
+    <mc:Choice Requires="p159">
       <p:transition xmlns:p14="http://schemas.microsoft.com/office/powerpoint/2010/main" spd="slow" p14:dur="2000">
         <p159:morph option="byObject"/>
       </p:transition>
     </mc:Choice>
-    <mc:Fallback>
+    <mc:Fallback xmlns="">
       <p:transition spd="slow">
         <p:fade/>
       </p:transition>
@@ -5679,13 +5684,13 @@
   <p:clrMapOvr>
     <a:masterClrMapping/>
   </p:clrMapOvr>
-  <mc:AlternateContent xmlns:mc="http://schemas.openxmlformats.org/markup-compatibility/2006">
-    <mc:Choice xmlns:p159="http://schemas.microsoft.com/office/powerpoint/2015/09/main" Requires="p159">
+  <mc:AlternateContent xmlns:mc="http://schemas.openxmlformats.org/markup-compatibility/2006" xmlns:p159="http://schemas.microsoft.com/office/powerpoint/2015/09/main">
+    <mc:Choice Requires="p159">
       <p:transition xmlns:p14="http://schemas.microsoft.com/office/powerpoint/2010/main" spd="slow" p14:dur="2000">
         <p159:morph option="byObject"/>
       </p:transition>
     </mc:Choice>
-    <mc:Fallback>
+    <mc:Fallback xmlns="">
       <p:transition spd="slow">
         <p:fade/>
       </p:transition>
@@ -6237,13 +6242,13 @@
   <p:clrMapOvr>
     <a:masterClrMapping/>
   </p:clrMapOvr>
-  <mc:AlternateContent xmlns:mc="http://schemas.openxmlformats.org/markup-compatibility/2006">
-    <mc:Choice xmlns:p159="http://schemas.microsoft.com/office/powerpoint/2015/09/main" Requires="p159">
+  <mc:AlternateContent xmlns:mc="http://schemas.openxmlformats.org/markup-compatibility/2006" xmlns:p159="http://schemas.microsoft.com/office/powerpoint/2015/09/main">
+    <mc:Choice Requires="p159">
       <p:transition xmlns:p14="http://schemas.microsoft.com/office/powerpoint/2010/main" spd="slow" p14:dur="2000">
         <p159:morph option="byObject"/>
       </p:transition>
     </mc:Choice>
-    <mc:Fallback>
+    <mc:Fallback xmlns="">
       <p:transition spd="slow">
         <p:fade/>
       </p:transition>
@@ -6969,13 +6974,13 @@
   <p:clrMapOvr>
     <a:masterClrMapping/>
   </p:clrMapOvr>
-  <mc:AlternateContent xmlns:mc="http://schemas.openxmlformats.org/markup-compatibility/2006">
-    <mc:Choice xmlns:p159="http://schemas.microsoft.com/office/powerpoint/2015/09/main" Requires="p159">
+  <mc:AlternateContent xmlns:mc="http://schemas.openxmlformats.org/markup-compatibility/2006" xmlns:p159="http://schemas.microsoft.com/office/powerpoint/2015/09/main">
+    <mc:Choice Requires="p159">
       <p:transition xmlns:p14="http://schemas.microsoft.com/office/powerpoint/2010/main" spd="slow" p14:dur="2000">
         <p159:morph option="byObject"/>
       </p:transition>
     </mc:Choice>
-    <mc:Fallback>
+    <mc:Fallback xmlns="">
       <p:transition spd="slow">
         <p:fade/>
       </p:transition>
@@ -7151,13 +7156,13 @@
   <p:clrMapOvr>
     <a:masterClrMapping/>
   </p:clrMapOvr>
-  <mc:AlternateContent xmlns:mc="http://schemas.openxmlformats.org/markup-compatibility/2006">
-    <mc:Choice xmlns:p159="http://schemas.microsoft.com/office/powerpoint/2015/09/main" Requires="p159">
+  <mc:AlternateContent xmlns:mc="http://schemas.openxmlformats.org/markup-compatibility/2006" xmlns:p159="http://schemas.microsoft.com/office/powerpoint/2015/09/main">
+    <mc:Choice Requires="p159">
       <p:transition xmlns:p14="http://schemas.microsoft.com/office/powerpoint/2010/main" spd="slow" p14:dur="2000">
         <p159:morph option="byObject"/>
       </p:transition>
     </mc:Choice>
-    <mc:Fallback>
+    <mc:Fallback xmlns="">
       <p:transition spd="slow">
         <p:fade/>
       </p:transition>
@@ -7343,13 +7348,13 @@
   <p:clrMapOvr>
     <a:masterClrMapping/>
   </p:clrMapOvr>
-  <mc:AlternateContent xmlns:mc="http://schemas.openxmlformats.org/markup-compatibility/2006">
-    <mc:Choice xmlns:p159="http://schemas.microsoft.com/office/powerpoint/2015/09/main" Requires="p159">
+  <mc:AlternateContent xmlns:mc="http://schemas.openxmlformats.org/markup-compatibility/2006" xmlns:p159="http://schemas.microsoft.com/office/powerpoint/2015/09/main">
+    <mc:Choice Requires="p159">
       <p:transition xmlns:p14="http://schemas.microsoft.com/office/powerpoint/2010/main" spd="slow" p14:dur="2000">
         <p159:morph option="byObject"/>
       </p:transition>
     </mc:Choice>
-    <mc:Fallback>
+    <mc:Fallback xmlns="">
       <p:transition spd="slow">
         <p:fade/>
       </p:transition>
@@ -7525,13 +7530,13 @@
   <p:clrMapOvr>
     <a:masterClrMapping/>
   </p:clrMapOvr>
-  <mc:AlternateContent xmlns:mc="http://schemas.openxmlformats.org/markup-compatibility/2006">
-    <mc:Choice xmlns:p159="http://schemas.microsoft.com/office/powerpoint/2015/09/main" Requires="p159">
+  <mc:AlternateContent xmlns:mc="http://schemas.openxmlformats.org/markup-compatibility/2006" xmlns:p159="http://schemas.microsoft.com/office/powerpoint/2015/09/main">
+    <mc:Choice Requires="p159">
       <p:transition xmlns:p14="http://schemas.microsoft.com/office/powerpoint/2010/main" spd="slow" p14:dur="2000">
         <p159:morph option="byObject"/>
       </p:transition>
     </mc:Choice>
-    <mc:Fallback>
+    <mc:Fallback xmlns="">
       <p:transition spd="slow">
         <p:fade/>
       </p:transition>
@@ -7787,13 +7792,13 @@
   <p:clrMapOvr>
     <a:masterClrMapping/>
   </p:clrMapOvr>
-  <mc:AlternateContent xmlns:mc="http://schemas.openxmlformats.org/markup-compatibility/2006">
-    <mc:Choice xmlns:p159="http://schemas.microsoft.com/office/powerpoint/2015/09/main" Requires="p159">
+  <mc:AlternateContent xmlns:mc="http://schemas.openxmlformats.org/markup-compatibility/2006" xmlns:p159="http://schemas.microsoft.com/office/powerpoint/2015/09/main">
+    <mc:Choice Requires="p159">
       <p:transition xmlns:p14="http://schemas.microsoft.com/office/powerpoint/2010/main" spd="slow" p14:dur="2000">
         <p159:morph option="byObject"/>
       </p:transition>
     </mc:Choice>
-    <mc:Fallback>
+    <mc:Fallback xmlns="">
       <p:transition spd="slow">
         <p:fade/>
       </p:transition>
@@ -8031,13 +8036,13 @@
   <p:clrMapOvr>
     <a:masterClrMapping/>
   </p:clrMapOvr>
-  <mc:AlternateContent xmlns:mc="http://schemas.openxmlformats.org/markup-compatibility/2006">
-    <mc:Choice xmlns:p159="http://schemas.microsoft.com/office/powerpoint/2015/09/main" Requires="p159">
+  <mc:AlternateContent xmlns:mc="http://schemas.openxmlformats.org/markup-compatibility/2006" xmlns:p159="http://schemas.microsoft.com/office/powerpoint/2015/09/main">
+    <mc:Choice Requires="p159">
       <p:transition xmlns:p14="http://schemas.microsoft.com/office/powerpoint/2010/main" spd="slow" p14:dur="2000">
         <p159:morph option="byObject"/>
       </p:transition>
     </mc:Choice>
-    <mc:Fallback>
+    <mc:Fallback xmlns="">
       <p:transition spd="slow">
         <p:fade/>
       </p:transition>
@@ -8424,13 +8429,13 @@
   <p:clrMapOvr>
     <a:masterClrMapping/>
   </p:clrMapOvr>
-  <mc:AlternateContent xmlns:mc="http://schemas.openxmlformats.org/markup-compatibility/2006">
-    <mc:Choice xmlns:p159="http://schemas.microsoft.com/office/powerpoint/2015/09/main" Requires="p159">
+  <mc:AlternateContent xmlns:mc="http://schemas.openxmlformats.org/markup-compatibility/2006" xmlns:p159="http://schemas.microsoft.com/office/powerpoint/2015/09/main">
+    <mc:Choice Requires="p159">
       <p:transition xmlns:p14="http://schemas.microsoft.com/office/powerpoint/2010/main" spd="slow" p14:dur="2000">
         <p159:morph option="byObject"/>
       </p:transition>
     </mc:Choice>
-    <mc:Fallback>
+    <mc:Fallback xmlns="">
       <p:transition spd="slow">
         <p:fade/>
       </p:transition>
@@ -8554,13 +8559,13 @@
   <p:clrMapOvr>
     <a:masterClrMapping/>
   </p:clrMapOvr>
-  <mc:AlternateContent xmlns:mc="http://schemas.openxmlformats.org/markup-compatibility/2006">
-    <mc:Choice xmlns:p159="http://schemas.microsoft.com/office/powerpoint/2015/09/main" Requires="p159">
+  <mc:AlternateContent xmlns:mc="http://schemas.openxmlformats.org/markup-compatibility/2006" xmlns:p159="http://schemas.microsoft.com/office/powerpoint/2015/09/main">
+    <mc:Choice Requires="p159">
       <p:transition xmlns:p14="http://schemas.microsoft.com/office/powerpoint/2010/main" spd="slow" p14:dur="2000">
         <p159:morph option="byObject"/>
       </p:transition>
     </mc:Choice>
-    <mc:Fallback>
+    <mc:Fallback xmlns="">
       <p:transition spd="slow">
         <p:fade/>
       </p:transition>
@@ -8661,13 +8666,13 @@
   <p:clrMapOvr>
     <a:masterClrMapping/>
   </p:clrMapOvr>
-  <mc:AlternateContent xmlns:mc="http://schemas.openxmlformats.org/markup-compatibility/2006">
-    <mc:Choice xmlns:p159="http://schemas.microsoft.com/office/powerpoint/2015/09/main" Requires="p159">
+  <mc:AlternateContent xmlns:mc="http://schemas.openxmlformats.org/markup-compatibility/2006" xmlns:p159="http://schemas.microsoft.com/office/powerpoint/2015/09/main">
+    <mc:Choice Requires="p159">
       <p:transition xmlns:p14="http://schemas.microsoft.com/office/powerpoint/2010/main" spd="slow" p14:dur="2000">
         <p159:morph option="byObject"/>
       </p:transition>
     </mc:Choice>
-    <mc:Fallback>
+    <mc:Fallback xmlns="">
       <p:transition spd="slow">
         <p:fade/>
       </p:transition>
@@ -8922,13 +8927,13 @@
   <p:clrMapOvr>
     <a:masterClrMapping/>
   </p:clrMapOvr>
-  <mc:AlternateContent xmlns:mc="http://schemas.openxmlformats.org/markup-compatibility/2006">
-    <mc:Choice xmlns:p159="http://schemas.microsoft.com/office/powerpoint/2015/09/main" Requires="p159">
+  <mc:AlternateContent xmlns:mc="http://schemas.openxmlformats.org/markup-compatibility/2006" xmlns:p159="http://schemas.microsoft.com/office/powerpoint/2015/09/main">
+    <mc:Choice Requires="p159">
       <p:transition xmlns:p14="http://schemas.microsoft.com/office/powerpoint/2010/main" spd="slow" p14:dur="2000">
         <p159:morph option="byObject"/>
       </p:transition>
     </mc:Choice>
-    <mc:Fallback>
+    <mc:Fallback xmlns="">
       <p:transition spd="slow">
         <p:fade/>
       </p:transition>
@@ -9214,13 +9219,13 @@
   <p:clrMapOvr>
     <a:masterClrMapping/>
   </p:clrMapOvr>
-  <mc:AlternateContent xmlns:mc="http://schemas.openxmlformats.org/markup-compatibility/2006">
-    <mc:Choice xmlns:p159="http://schemas.microsoft.com/office/powerpoint/2015/09/main" Requires="p159">
+  <mc:AlternateContent xmlns:mc="http://schemas.openxmlformats.org/markup-compatibility/2006" xmlns:p159="http://schemas.microsoft.com/office/powerpoint/2015/09/main">
+    <mc:Choice Requires="p159">
       <p:transition xmlns:p14="http://schemas.microsoft.com/office/powerpoint/2010/main" spd="slow" p14:dur="2000">
         <p159:morph option="byObject"/>
       </p:transition>
     </mc:Choice>
-    <mc:Fallback>
+    <mc:Fallback xmlns="">
       <p:transition spd="slow">
         <p:fade/>
       </p:transition>
@@ -9291,7 +9296,7 @@
           <a:noFill/>
           <a:extLst>
             <a:ext uri="{909E8E84-426E-40dd-AFC4-6F175D3DCCD1}">
-              <a14:hiddenFill xmlns:a14="http://schemas.microsoft.com/office/drawing/2010/main" xmlns="">
+              <a14:hiddenFill xmlns="" xmlns:a14="http://schemas.microsoft.com/office/drawing/2010/main">
                 <a:solidFill>
                   <a:srgbClr val="FFFFFF"/>
                 </a:solidFill>
@@ -9365,7 +9370,7 @@
               </a:ln>
               <a:extLst>
                 <a:ext uri="{91240B29-F687-4f45-9708-019B960494DF}">
-                  <a14:hiddenLine xmlns:a14="http://schemas.microsoft.com/office/drawing/2010/main" xmlns="" w="9525">
+                  <a14:hiddenLine xmlns="" xmlns:a14="http://schemas.microsoft.com/office/drawing/2010/main" w="9525">
                     <a:solidFill>
                       <a:srgbClr val="000000"/>
                     </a:solidFill>
@@ -9455,7 +9460,7 @@
               </a:ln>
               <a:extLst>
                 <a:ext uri="{91240B29-F687-4f45-9708-019B960494DF}">
-                  <a14:hiddenLine xmlns:a14="http://schemas.microsoft.com/office/drawing/2010/main" xmlns="" w="9525">
+                  <a14:hiddenLine xmlns="" xmlns:a14="http://schemas.microsoft.com/office/drawing/2010/main" w="9525">
                     <a:solidFill>
                       <a:srgbClr val="000000"/>
                     </a:solidFill>
@@ -9545,7 +9550,7 @@
               </a:ln>
               <a:extLst>
                 <a:ext uri="{91240B29-F687-4f45-9708-019B960494DF}">
-                  <a14:hiddenLine xmlns:a14="http://schemas.microsoft.com/office/drawing/2010/main" xmlns="" w="9525">
+                  <a14:hiddenLine xmlns="" xmlns:a14="http://schemas.microsoft.com/office/drawing/2010/main" w="9525">
                     <a:solidFill>
                       <a:srgbClr val="000000"/>
                     </a:solidFill>
@@ -9607,7 +9612,7 @@
               </a:ln>
               <a:extLst>
                 <a:ext uri="{91240B29-F687-4f45-9708-019B960494DF}">
-                  <a14:hiddenLine xmlns:a14="http://schemas.microsoft.com/office/drawing/2010/main" xmlns="" w="9525">
+                  <a14:hiddenLine xmlns="" xmlns:a14="http://schemas.microsoft.com/office/drawing/2010/main" w="9525">
                     <a:solidFill>
                       <a:srgbClr val="000000"/>
                     </a:solidFill>
@@ -9697,7 +9702,7 @@
               </a:ln>
               <a:extLst>
                 <a:ext uri="{91240B29-F687-4f45-9708-019B960494DF}">
-                  <a14:hiddenLine xmlns:a14="http://schemas.microsoft.com/office/drawing/2010/main" xmlns="" w="9525">
+                  <a14:hiddenLine xmlns="" xmlns:a14="http://schemas.microsoft.com/office/drawing/2010/main" w="9525">
                     <a:solidFill>
                       <a:srgbClr val="000000"/>
                     </a:solidFill>
@@ -9759,7 +9764,7 @@
               </a:ln>
               <a:extLst>
                 <a:ext uri="{91240B29-F687-4f45-9708-019B960494DF}">
-                  <a14:hiddenLine xmlns:a14="http://schemas.microsoft.com/office/drawing/2010/main" xmlns="" w="9525">
+                  <a14:hiddenLine xmlns="" xmlns:a14="http://schemas.microsoft.com/office/drawing/2010/main" w="9525">
                     <a:solidFill>
                       <a:srgbClr val="000000"/>
                     </a:solidFill>
@@ -9821,7 +9826,7 @@
               </a:ln>
               <a:extLst>
                 <a:ext uri="{91240B29-F687-4f45-9708-019B960494DF}">
-                  <a14:hiddenLine xmlns:a14="http://schemas.microsoft.com/office/drawing/2010/main" xmlns="" w="9525">
+                  <a14:hiddenLine xmlns="" xmlns:a14="http://schemas.microsoft.com/office/drawing/2010/main" w="9525">
                     <a:solidFill>
                       <a:srgbClr val="000000"/>
                     </a:solidFill>
@@ -9911,7 +9916,7 @@
               </a:ln>
               <a:extLst>
                 <a:ext uri="{91240B29-F687-4f45-9708-019B960494DF}">
-                  <a14:hiddenLine xmlns:a14="http://schemas.microsoft.com/office/drawing/2010/main" xmlns="" w="9525">
+                  <a14:hiddenLine xmlns="" xmlns:a14="http://schemas.microsoft.com/office/drawing/2010/main" w="9525">
                     <a:solidFill>
                       <a:srgbClr val="000000"/>
                     </a:solidFill>
@@ -10001,7 +10006,7 @@
               </a:ln>
               <a:extLst>
                 <a:ext uri="{91240B29-F687-4f45-9708-019B960494DF}">
-                  <a14:hiddenLine xmlns:a14="http://schemas.microsoft.com/office/drawing/2010/main" xmlns="" w="9525">
+                  <a14:hiddenLine xmlns="" xmlns:a14="http://schemas.microsoft.com/office/drawing/2010/main" w="9525">
                     <a:solidFill>
                       <a:srgbClr val="000000"/>
                     </a:solidFill>
@@ -10063,7 +10068,7 @@
               </a:ln>
               <a:extLst>
                 <a:ext uri="{91240B29-F687-4f45-9708-019B960494DF}">
-                  <a14:hiddenLine xmlns:a14="http://schemas.microsoft.com/office/drawing/2010/main" xmlns="" w="9525">
+                  <a14:hiddenLine xmlns="" xmlns:a14="http://schemas.microsoft.com/office/drawing/2010/main" w="9525">
                     <a:solidFill>
                       <a:srgbClr val="000000"/>
                     </a:solidFill>
@@ -10173,7 +10178,7 @@
               </a:ln>
               <a:extLst>
                 <a:ext uri="{91240B29-F687-4f45-9708-019B960494DF}">
-                  <a14:hiddenLine xmlns:a14="http://schemas.microsoft.com/office/drawing/2010/main" xmlns="" w="9525">
+                  <a14:hiddenLine xmlns="" xmlns:a14="http://schemas.microsoft.com/office/drawing/2010/main" w="9525">
                     <a:solidFill>
                       <a:srgbClr val="000000"/>
                     </a:solidFill>
@@ -10257,7 +10262,7 @@
               </a:ln>
               <a:extLst>
                 <a:ext uri="{91240B29-F687-4f45-9708-019B960494DF}">
-                  <a14:hiddenLine xmlns:a14="http://schemas.microsoft.com/office/drawing/2010/main" xmlns="" w="9525">
+                  <a14:hiddenLine xmlns="" xmlns:a14="http://schemas.microsoft.com/office/drawing/2010/main" w="9525">
                     <a:solidFill>
                       <a:srgbClr val="000000"/>
                     </a:solidFill>
@@ -10319,7 +10324,7 @@
               </a:ln>
               <a:extLst>
                 <a:ext uri="{91240B29-F687-4f45-9708-019B960494DF}">
-                  <a14:hiddenLine xmlns:a14="http://schemas.microsoft.com/office/drawing/2010/main" xmlns="" w="9525">
+                  <a14:hiddenLine xmlns="" xmlns:a14="http://schemas.microsoft.com/office/drawing/2010/main" w="9525">
                     <a:solidFill>
                       <a:srgbClr val="000000"/>
                     </a:solidFill>
@@ -10381,7 +10386,7 @@
               </a:ln>
               <a:extLst>
                 <a:ext uri="{91240B29-F687-4f45-9708-019B960494DF}">
-                  <a14:hiddenLine xmlns:a14="http://schemas.microsoft.com/office/drawing/2010/main" xmlns="" w="9525">
+                  <a14:hiddenLine xmlns="" xmlns:a14="http://schemas.microsoft.com/office/drawing/2010/main" w="9525">
                     <a:solidFill>
                       <a:srgbClr val="000000"/>
                     </a:solidFill>
@@ -10471,7 +10476,7 @@
               </a:ln>
               <a:extLst>
                 <a:ext uri="{91240B29-F687-4f45-9708-019B960494DF}">
-                  <a14:hiddenLine xmlns:a14="http://schemas.microsoft.com/office/drawing/2010/main" xmlns="" w="9525">
+                  <a14:hiddenLine xmlns="" xmlns:a14="http://schemas.microsoft.com/office/drawing/2010/main" w="9525">
                     <a:solidFill>
                       <a:srgbClr val="000000"/>
                     </a:solidFill>
@@ -10505,7 +10510,7 @@
               </a:ln>
               <a:extLst>
                 <a:ext uri="{91240B29-F687-4f45-9708-019B960494DF}">
-                  <a14:hiddenLine xmlns:a14="http://schemas.microsoft.com/office/drawing/2010/main" xmlns="" w="9525">
+                  <a14:hiddenLine xmlns="" xmlns:a14="http://schemas.microsoft.com/office/drawing/2010/main" w="9525">
                     <a:solidFill>
                       <a:srgbClr val="000000"/>
                     </a:solidFill>
@@ -10570,7 +10575,7 @@
               </a:ln>
               <a:extLst>
                 <a:ext uri="{91240B29-F687-4f45-9708-019B960494DF}">
-                  <a14:hiddenLine xmlns:a14="http://schemas.microsoft.com/office/drawing/2010/main" xmlns="" w="9525">
+                  <a14:hiddenLine xmlns="" xmlns:a14="http://schemas.microsoft.com/office/drawing/2010/main" w="9525">
                     <a:solidFill>
                       <a:srgbClr val="000000"/>
                     </a:solidFill>
@@ -10660,7 +10665,7 @@
               </a:ln>
               <a:extLst>
                 <a:ext uri="{91240B29-F687-4f45-9708-019B960494DF}">
-                  <a14:hiddenLine xmlns:a14="http://schemas.microsoft.com/office/drawing/2010/main" xmlns="" w="9525">
+                  <a14:hiddenLine xmlns="" xmlns:a14="http://schemas.microsoft.com/office/drawing/2010/main" w="9525">
                     <a:solidFill>
                       <a:srgbClr val="000000"/>
                     </a:solidFill>
@@ -10722,7 +10727,7 @@
               </a:ln>
               <a:extLst>
                 <a:ext uri="{91240B29-F687-4f45-9708-019B960494DF}">
-                  <a14:hiddenLine xmlns:a14="http://schemas.microsoft.com/office/drawing/2010/main" xmlns="" w="9525">
+                  <a14:hiddenLine xmlns="" xmlns:a14="http://schemas.microsoft.com/office/drawing/2010/main" w="9525">
                     <a:solidFill>
                       <a:srgbClr val="000000"/>
                     </a:solidFill>
@@ -10812,7 +10817,7 @@
               </a:ln>
               <a:extLst>
                 <a:ext uri="{91240B29-F687-4f45-9708-019B960494DF}">
-                  <a14:hiddenLine xmlns:a14="http://schemas.microsoft.com/office/drawing/2010/main" xmlns="" w="9525">
+                  <a14:hiddenLine xmlns="" xmlns:a14="http://schemas.microsoft.com/office/drawing/2010/main" w="9525">
                     <a:solidFill>
                       <a:srgbClr val="000000"/>
                     </a:solidFill>
@@ -10877,7 +10882,7 @@
               </a:ln>
               <a:extLst>
                 <a:ext uri="{91240B29-F687-4f45-9708-019B960494DF}">
-                  <a14:hiddenLine xmlns:a14="http://schemas.microsoft.com/office/drawing/2010/main" xmlns="" w="9525">
+                  <a14:hiddenLine xmlns="" xmlns:a14="http://schemas.microsoft.com/office/drawing/2010/main" w="9525">
                     <a:solidFill>
                       <a:srgbClr val="000000"/>
                     </a:solidFill>
@@ -10939,7 +10944,7 @@
               </a:ln>
               <a:extLst>
                 <a:ext uri="{91240B29-F687-4f45-9708-019B960494DF}">
-                  <a14:hiddenLine xmlns:a14="http://schemas.microsoft.com/office/drawing/2010/main" xmlns="" w="9525">
+                  <a14:hiddenLine xmlns="" xmlns:a14="http://schemas.microsoft.com/office/drawing/2010/main" w="9525">
                     <a:solidFill>
                       <a:srgbClr val="000000"/>
                     </a:solidFill>
@@ -11029,7 +11034,7 @@
               </a:ln>
               <a:extLst>
                 <a:ext uri="{91240B29-F687-4f45-9708-019B960494DF}">
-                  <a14:hiddenLine xmlns:a14="http://schemas.microsoft.com/office/drawing/2010/main" xmlns="" w="9525">
+                  <a14:hiddenLine xmlns="" xmlns:a14="http://schemas.microsoft.com/office/drawing/2010/main" w="9525">
                     <a:solidFill>
                       <a:srgbClr val="000000"/>
                     </a:solidFill>
@@ -11119,7 +11124,7 @@
               </a:ln>
               <a:extLst>
                 <a:ext uri="{91240B29-F687-4f45-9708-019B960494DF}">
-                  <a14:hiddenLine xmlns:a14="http://schemas.microsoft.com/office/drawing/2010/main" xmlns="" w="9525">
+                  <a14:hiddenLine xmlns="" xmlns:a14="http://schemas.microsoft.com/office/drawing/2010/main" w="9525">
                     <a:solidFill>
                       <a:srgbClr val="000000"/>
                     </a:solidFill>
@@ -11184,7 +11189,7 @@
               </a:ln>
               <a:extLst>
                 <a:ext uri="{91240B29-F687-4f45-9708-019B960494DF}">
-                  <a14:hiddenLine xmlns:a14="http://schemas.microsoft.com/office/drawing/2010/main" xmlns="" w="9525">
+                  <a14:hiddenLine xmlns="" xmlns:a14="http://schemas.microsoft.com/office/drawing/2010/main" w="9525">
                     <a:solidFill>
                       <a:srgbClr val="000000"/>
                     </a:solidFill>
@@ -11304,7 +11309,7 @@
               </a:ln>
               <a:extLst>
                 <a:ext uri="{91240B29-F687-4f45-9708-019B960494DF}">
-                  <a14:hiddenLine xmlns:a14="http://schemas.microsoft.com/office/drawing/2010/main" xmlns="" w="9525">
+                  <a14:hiddenLine xmlns="" xmlns:a14="http://schemas.microsoft.com/office/drawing/2010/main" w="9525">
                     <a:solidFill>
                       <a:srgbClr val="000000"/>
                     </a:solidFill>
@@ -11385,7 +11390,7 @@
               </a:ln>
               <a:extLst>
                 <a:ext uri="{91240B29-F687-4f45-9708-019B960494DF}">
-                  <a14:hiddenLine xmlns:a14="http://schemas.microsoft.com/office/drawing/2010/main" xmlns="" w="9525">
+                  <a14:hiddenLine xmlns="" xmlns:a14="http://schemas.microsoft.com/office/drawing/2010/main" w="9525">
                     <a:solidFill>
                       <a:srgbClr val="000000"/>
                     </a:solidFill>
@@ -11500,7 +11505,7 @@
               </a:ln>
               <a:extLst>
                 <a:ext uri="{91240B29-F687-4f45-9708-019B960494DF}">
-                  <a14:hiddenLine xmlns:a14="http://schemas.microsoft.com/office/drawing/2010/main" xmlns="" w="9525">
+                  <a14:hiddenLine xmlns="" xmlns:a14="http://schemas.microsoft.com/office/drawing/2010/main" w="9525">
                     <a:solidFill>
                       <a:srgbClr val="000000"/>
                     </a:solidFill>
@@ -11590,7 +11595,7 @@
               </a:ln>
               <a:extLst>
                 <a:ext uri="{91240B29-F687-4f45-9708-019B960494DF}">
-                  <a14:hiddenLine xmlns:a14="http://schemas.microsoft.com/office/drawing/2010/main" xmlns="" w="9525">
+                  <a14:hiddenLine xmlns="" xmlns:a14="http://schemas.microsoft.com/office/drawing/2010/main" w="9525">
                     <a:solidFill>
                       <a:srgbClr val="000000"/>
                     </a:solidFill>
@@ -11655,7 +11660,7 @@
               </a:ln>
               <a:extLst>
                 <a:ext uri="{91240B29-F687-4f45-9708-019B960494DF}">
-                  <a14:hiddenLine xmlns:a14="http://schemas.microsoft.com/office/drawing/2010/main" xmlns="" w="9525">
+                  <a14:hiddenLine xmlns="" xmlns:a14="http://schemas.microsoft.com/office/drawing/2010/main" w="9525">
                     <a:solidFill>
                       <a:srgbClr val="000000"/>
                     </a:solidFill>
@@ -11745,7 +11750,7 @@
               </a:ln>
               <a:extLst>
                 <a:ext uri="{91240B29-F687-4f45-9708-019B960494DF}">
-                  <a14:hiddenLine xmlns:a14="http://schemas.microsoft.com/office/drawing/2010/main" xmlns="" w="9525">
+                  <a14:hiddenLine xmlns="" xmlns:a14="http://schemas.microsoft.com/office/drawing/2010/main" w="9525">
                     <a:solidFill>
                       <a:srgbClr val="000000"/>
                     </a:solidFill>
@@ -11813,7 +11818,7 @@
               </a:ln>
               <a:extLst>
                 <a:ext uri="{91240B29-F687-4f45-9708-019B960494DF}">
-                  <a14:hiddenLine xmlns:a14="http://schemas.microsoft.com/office/drawing/2010/main" xmlns="" w="9525">
+                  <a14:hiddenLine xmlns="" xmlns:a14="http://schemas.microsoft.com/office/drawing/2010/main" w="9525">
                     <a:solidFill>
                       <a:srgbClr val="000000"/>
                     </a:solidFill>
@@ -11903,7 +11908,7 @@
               </a:ln>
               <a:extLst>
                 <a:ext uri="{91240B29-F687-4f45-9708-019B960494DF}">
-                  <a14:hiddenLine xmlns:a14="http://schemas.microsoft.com/office/drawing/2010/main" xmlns="" w="9525">
+                  <a14:hiddenLine xmlns="" xmlns:a14="http://schemas.microsoft.com/office/drawing/2010/main" w="9525">
                     <a:solidFill>
                       <a:srgbClr val="000000"/>
                     </a:solidFill>
@@ -11971,7 +11976,7 @@
               </a:ln>
               <a:extLst>
                 <a:ext uri="{91240B29-F687-4f45-9708-019B960494DF}">
-                  <a14:hiddenLine xmlns:a14="http://schemas.microsoft.com/office/drawing/2010/main" xmlns="" w="9525">
+                  <a14:hiddenLine xmlns="" xmlns:a14="http://schemas.microsoft.com/office/drawing/2010/main" w="9525">
                     <a:solidFill>
                       <a:srgbClr val="000000"/>
                     </a:solidFill>
@@ -12061,7 +12066,7 @@
               </a:ln>
               <a:extLst>
                 <a:ext uri="{91240B29-F687-4f45-9708-019B960494DF}">
-                  <a14:hiddenLine xmlns:a14="http://schemas.microsoft.com/office/drawing/2010/main" xmlns="" w="9525">
+                  <a14:hiddenLine xmlns="" xmlns:a14="http://schemas.microsoft.com/office/drawing/2010/main" w="9525">
                     <a:solidFill>
                       <a:srgbClr val="000000"/>
                     </a:solidFill>
@@ -12095,7 +12100,7 @@
               </a:ln>
               <a:extLst>
                 <a:ext uri="{91240B29-F687-4f45-9708-019B960494DF}">
-                  <a14:hiddenLine xmlns:a14="http://schemas.microsoft.com/office/drawing/2010/main" xmlns="" w="9525">
+                  <a14:hiddenLine xmlns="" xmlns:a14="http://schemas.microsoft.com/office/drawing/2010/main" w="9525">
                     <a:solidFill>
                       <a:srgbClr val="000000"/>
                     </a:solidFill>
@@ -12346,13 +12351,13 @@
     <p:sldLayoutId id="2147483694" r:id="rId16"/>
     <p:sldLayoutId id="2147483695" r:id="rId17"/>
   </p:sldLayoutIdLst>
-  <mc:AlternateContent xmlns:mc="http://schemas.openxmlformats.org/markup-compatibility/2006">
-    <mc:Choice xmlns:p159="http://schemas.microsoft.com/office/powerpoint/2015/09/main" Requires="p159">
+  <mc:AlternateContent xmlns:mc="http://schemas.openxmlformats.org/markup-compatibility/2006" xmlns:p159="http://schemas.microsoft.com/office/powerpoint/2015/09/main">
+    <mc:Choice Requires="p159">
       <p:transition xmlns:p14="http://schemas.microsoft.com/office/powerpoint/2010/main" spd="slow" p14:dur="2000">
         <p159:morph option="byObject"/>
       </p:transition>
     </mc:Choice>
-    <mc:Fallback>
+    <mc:Fallback xmlns="">
       <p:transition spd="slow">
         <p:fade/>
       </p:transition>
@@ -12766,13 +12771,13 @@
   <p:clrMapOvr>
     <a:masterClrMapping/>
   </p:clrMapOvr>
-  <mc:AlternateContent xmlns:mc="http://schemas.openxmlformats.org/markup-compatibility/2006">
-    <mc:Choice xmlns:p159="http://schemas.microsoft.com/office/powerpoint/2015/09/main" Requires="p159">
+  <mc:AlternateContent xmlns:mc="http://schemas.openxmlformats.org/markup-compatibility/2006" xmlns:p159="http://schemas.microsoft.com/office/powerpoint/2015/09/main">
+    <mc:Choice Requires="p159">
       <p:transition xmlns:p14="http://schemas.microsoft.com/office/powerpoint/2010/main" spd="slow" p14:dur="2000">
         <p159:morph option="byObject"/>
       </p:transition>
     </mc:Choice>
-    <mc:Fallback>
+    <mc:Fallback xmlns="">
       <p:transition spd="slow">
         <p:fade/>
       </p:transition>
@@ -12934,13 +12939,13 @@
   <p:clrMapOvr>
     <a:masterClrMapping/>
   </p:clrMapOvr>
-  <mc:AlternateContent xmlns:mc="http://schemas.openxmlformats.org/markup-compatibility/2006">
-    <mc:Choice xmlns:p159="http://schemas.microsoft.com/office/powerpoint/2015/09/main" Requires="p159">
+  <mc:AlternateContent xmlns:mc="http://schemas.openxmlformats.org/markup-compatibility/2006" xmlns:p159="http://schemas.microsoft.com/office/powerpoint/2015/09/main">
+    <mc:Choice Requires="p159">
       <p:transition xmlns:p14="http://schemas.microsoft.com/office/powerpoint/2010/main" spd="slow" p14:dur="2000">
         <p159:morph option="byObject"/>
       </p:transition>
     </mc:Choice>
-    <mc:Fallback>
+    <mc:Fallback xmlns="">
       <p:transition spd="slow">
         <p:fade/>
       </p:transition>
@@ -13094,13 +13099,13 @@
   <p:clrMapOvr>
     <a:masterClrMapping/>
   </p:clrMapOvr>
-  <mc:AlternateContent xmlns:mc="http://schemas.openxmlformats.org/markup-compatibility/2006">
-    <mc:Choice xmlns:p159="http://schemas.microsoft.com/office/powerpoint/2015/09/main" Requires="p159">
+  <mc:AlternateContent xmlns:mc="http://schemas.openxmlformats.org/markup-compatibility/2006" xmlns:p159="http://schemas.microsoft.com/office/powerpoint/2015/09/main">
+    <mc:Choice Requires="p159">
       <p:transition xmlns:p14="http://schemas.microsoft.com/office/powerpoint/2010/main" spd="slow" p14:dur="2000">
         <p159:morph option="byObject"/>
       </p:transition>
     </mc:Choice>
-    <mc:Fallback>
+    <mc:Fallback xmlns="">
       <p:transition spd="slow">
         <p:fade/>
       </p:transition>
@@ -13282,13 +13287,13 @@
   <p:clrMapOvr>
     <a:masterClrMapping/>
   </p:clrMapOvr>
-  <mc:AlternateContent xmlns:mc="http://schemas.openxmlformats.org/markup-compatibility/2006">
-    <mc:Choice xmlns:p159="http://schemas.microsoft.com/office/powerpoint/2015/09/main" Requires="p159">
+  <mc:AlternateContent xmlns:mc="http://schemas.openxmlformats.org/markup-compatibility/2006" xmlns:p159="http://schemas.microsoft.com/office/powerpoint/2015/09/main">
+    <mc:Choice Requires="p159">
       <p:transition xmlns:p14="http://schemas.microsoft.com/office/powerpoint/2010/main" spd="slow" p14:dur="2000">
         <p159:morph option="byObject"/>
       </p:transition>
     </mc:Choice>
-    <mc:Fallback>
+    <mc:Fallback xmlns="">
       <p:transition spd="slow">
         <p:fade/>
       </p:transition>
@@ -13543,13 +13548,13 @@
   <p:clrMapOvr>
     <a:masterClrMapping/>
   </p:clrMapOvr>
-  <mc:AlternateContent xmlns:mc="http://schemas.openxmlformats.org/markup-compatibility/2006">
-    <mc:Choice xmlns:p159="http://schemas.microsoft.com/office/powerpoint/2015/09/main" Requires="p159">
+  <mc:AlternateContent xmlns:mc="http://schemas.openxmlformats.org/markup-compatibility/2006" xmlns:p159="http://schemas.microsoft.com/office/powerpoint/2015/09/main">
+    <mc:Choice Requires="p159">
       <p:transition xmlns:p14="http://schemas.microsoft.com/office/powerpoint/2010/main" spd="slow" p14:dur="2000">
         <p159:morph option="byObject"/>
       </p:transition>
     </mc:Choice>
-    <mc:Fallback>
+    <mc:Fallback xmlns="">
       <p:transition spd="slow">
         <p:fade/>
       </p:transition>
@@ -13707,13 +13712,13 @@
   <p:clrMapOvr>
     <a:masterClrMapping/>
   </p:clrMapOvr>
-  <mc:AlternateContent xmlns:mc="http://schemas.openxmlformats.org/markup-compatibility/2006">
-    <mc:Choice xmlns:p159="http://schemas.microsoft.com/office/powerpoint/2015/09/main" Requires="p159">
+  <mc:AlternateContent xmlns:mc="http://schemas.openxmlformats.org/markup-compatibility/2006" xmlns:p159="http://schemas.microsoft.com/office/powerpoint/2015/09/main">
+    <mc:Choice Requires="p159">
       <p:transition xmlns:p14="http://schemas.microsoft.com/office/powerpoint/2010/main" spd="slow" p14:dur="2000">
         <p159:morph option="byObject"/>
       </p:transition>
     </mc:Choice>
-    <mc:Fallback>
+    <mc:Fallback xmlns="">
       <p:transition spd="slow">
         <p:fade/>
       </p:transition>
@@ -13882,13 +13887,13 @@
   <p:clrMapOvr>
     <a:masterClrMapping/>
   </p:clrMapOvr>
-  <mc:AlternateContent xmlns:mc="http://schemas.openxmlformats.org/markup-compatibility/2006">
-    <mc:Choice xmlns:p159="http://schemas.microsoft.com/office/powerpoint/2015/09/main" Requires="p159">
+  <mc:AlternateContent xmlns:mc="http://schemas.openxmlformats.org/markup-compatibility/2006" xmlns:p159="http://schemas.microsoft.com/office/powerpoint/2015/09/main">
+    <mc:Choice Requires="p159">
       <p:transition xmlns:p14="http://schemas.microsoft.com/office/powerpoint/2010/main" spd="slow" p14:dur="2000">
         <p159:morph option="byObject"/>
       </p:transition>
     </mc:Choice>
-    <mc:Fallback>
+    <mc:Fallback xmlns="">
       <p:transition spd="slow">
         <p:fade/>
       </p:transition>
@@ -14033,13 +14038,13 @@
   <p:clrMapOvr>
     <a:masterClrMapping/>
   </p:clrMapOvr>
-  <mc:AlternateContent xmlns:mc="http://schemas.openxmlformats.org/markup-compatibility/2006">
-    <mc:Choice xmlns:p159="http://schemas.microsoft.com/office/powerpoint/2015/09/main" Requires="p159">
+  <mc:AlternateContent xmlns:mc="http://schemas.openxmlformats.org/markup-compatibility/2006" xmlns:p159="http://schemas.microsoft.com/office/powerpoint/2015/09/main">
+    <mc:Choice Requires="p159">
       <p:transition xmlns:p14="http://schemas.microsoft.com/office/powerpoint/2010/main" spd="slow" p14:dur="2000">
         <p159:morph option="byObject"/>
       </p:transition>
     </mc:Choice>
-    <mc:Fallback>
+    <mc:Fallback xmlns="">
       <p:transition spd="slow">
         <p:fade/>
       </p:transition>
@@ -14184,13 +14189,13 @@
   <p:clrMapOvr>
     <a:masterClrMapping/>
   </p:clrMapOvr>
-  <mc:AlternateContent xmlns:mc="http://schemas.openxmlformats.org/markup-compatibility/2006">
-    <mc:Choice xmlns:p159="http://schemas.microsoft.com/office/powerpoint/2015/09/main" Requires="p159">
+  <mc:AlternateContent xmlns:mc="http://schemas.openxmlformats.org/markup-compatibility/2006" xmlns:p159="http://schemas.microsoft.com/office/powerpoint/2015/09/main">
+    <mc:Choice Requires="p159">
       <p:transition xmlns:p14="http://schemas.microsoft.com/office/powerpoint/2010/main" spd="slow" p14:dur="2000">
         <p159:morph option="byObject"/>
       </p:transition>
     </mc:Choice>
-    <mc:Fallback>
+    <mc:Fallback xmlns="">
       <p:transition spd="slow">
         <p:fade/>
       </p:transition>
@@ -14335,13 +14340,13 @@
   <p:clrMapOvr>
     <a:masterClrMapping/>
   </p:clrMapOvr>
-  <mc:AlternateContent xmlns:mc="http://schemas.openxmlformats.org/markup-compatibility/2006">
-    <mc:Choice xmlns:p159="http://schemas.microsoft.com/office/powerpoint/2015/09/main" Requires="p159">
+  <mc:AlternateContent xmlns:mc="http://schemas.openxmlformats.org/markup-compatibility/2006" xmlns:p159="http://schemas.microsoft.com/office/powerpoint/2015/09/main">
+    <mc:Choice Requires="p159">
       <p:transition xmlns:p14="http://schemas.microsoft.com/office/powerpoint/2010/main" spd="slow" p14:dur="2000">
         <p159:morph option="byObject"/>
       </p:transition>
     </mc:Choice>
-    <mc:Fallback>
+    <mc:Fallback xmlns="">
       <p:transition spd="slow">
         <p:fade/>
       </p:transition>
@@ -14466,13 +14471,13 @@
   <p:clrMapOvr>
     <a:masterClrMapping/>
   </p:clrMapOvr>
-  <mc:AlternateContent xmlns:mc="http://schemas.openxmlformats.org/markup-compatibility/2006">
-    <mc:Choice xmlns:p159="http://schemas.microsoft.com/office/powerpoint/2015/09/main" Requires="p159">
+  <mc:AlternateContent xmlns:mc="http://schemas.openxmlformats.org/markup-compatibility/2006" xmlns:p159="http://schemas.microsoft.com/office/powerpoint/2015/09/main">
+    <mc:Choice Requires="p159">
       <p:transition xmlns:p14="http://schemas.microsoft.com/office/powerpoint/2010/main" spd="slow" p14:dur="2000">
         <p159:morph option="byObject"/>
       </p:transition>
     </mc:Choice>
-    <mc:Fallback>
+    <mc:Fallback xmlns="">
       <p:transition spd="slow">
         <p:fade/>
       </p:transition>
@@ -14597,13 +14602,13 @@
   <p:clrMapOvr>
     <a:masterClrMapping/>
   </p:clrMapOvr>
-  <mc:AlternateContent xmlns:mc="http://schemas.openxmlformats.org/markup-compatibility/2006">
-    <mc:Choice xmlns:p159="http://schemas.microsoft.com/office/powerpoint/2015/09/main" Requires="p159">
+  <mc:AlternateContent xmlns:mc="http://schemas.openxmlformats.org/markup-compatibility/2006" xmlns:p159="http://schemas.microsoft.com/office/powerpoint/2015/09/main">
+    <mc:Choice Requires="p159">
       <p:transition xmlns:p14="http://schemas.microsoft.com/office/powerpoint/2010/main" spd="slow" p14:dur="2000">
         <p159:morph option="byObject"/>
       </p:transition>
     </mc:Choice>
-    <mc:Fallback>
+    <mc:Fallback xmlns="">
       <p:transition spd="slow">
         <p:fade/>
       </p:transition>
@@ -14748,13 +14753,13 @@
   <p:clrMapOvr>
     <a:masterClrMapping/>
   </p:clrMapOvr>
-  <mc:AlternateContent xmlns:mc="http://schemas.openxmlformats.org/markup-compatibility/2006">
-    <mc:Choice xmlns:p159="http://schemas.microsoft.com/office/powerpoint/2015/09/main" Requires="p159">
+  <mc:AlternateContent xmlns:mc="http://schemas.openxmlformats.org/markup-compatibility/2006" xmlns:p159="http://schemas.microsoft.com/office/powerpoint/2015/09/main">
+    <mc:Choice Requires="p159">
       <p:transition xmlns:p14="http://schemas.microsoft.com/office/powerpoint/2010/main" spd="slow" p14:dur="2000">
         <p159:morph option="byObject"/>
       </p:transition>
     </mc:Choice>
-    <mc:Fallback>
+    <mc:Fallback xmlns="">
       <p:transition spd="slow">
         <p:fade/>
       </p:transition>
@@ -14831,13 +14836,13 @@
   <p:clrMapOvr>
     <a:masterClrMapping/>
   </p:clrMapOvr>
-  <mc:AlternateContent xmlns:mc="http://schemas.openxmlformats.org/markup-compatibility/2006">
-    <mc:Choice xmlns:p159="http://schemas.microsoft.com/office/powerpoint/2015/09/main" Requires="p159">
+  <mc:AlternateContent xmlns:mc="http://schemas.openxmlformats.org/markup-compatibility/2006" xmlns:p159="http://schemas.microsoft.com/office/powerpoint/2015/09/main">
+    <mc:Choice Requires="p159">
       <p:transition xmlns:p14="http://schemas.microsoft.com/office/powerpoint/2010/main" spd="slow" p14:dur="2000">
         <p159:morph option="byObject"/>
       </p:transition>
     </mc:Choice>
-    <mc:Fallback>
+    <mc:Fallback xmlns="">
       <p:transition spd="slow">
         <p:fade/>
       </p:transition>
@@ -14912,13 +14917,17 @@
         <p:spPr/>
         <p:txBody>
           <a:bodyPr>
-            <a:normAutofit lnSpcReduction="10000"/>
+            <a:normAutofit fontScale="92500"/>
           </a:bodyPr>
           <a:lstStyle/>
           <a:p>
             <a:r>
+              <a:rPr lang="hu-HU" sz="2800"/>
+              <a:t>A foglalásod </a:t>
+            </a:r>
+            <a:r>
               <a:rPr lang="hu-HU" sz="2800" dirty="0"/>
-              <a:t>A foglalás megerősítése e-mailben történik – a rendszer visszaigazoló üzenetet küld, amelyben megerősítjük, hogy a foglalásod sikeresen megtörtént</a:t>
+              <a:t>megerősítése e-mailben történik – a rendszer visszaigazoló üzenetet küld, amelyben megerősítjük, hogy a foglalásod sikeresen megtörtént</a:t>
             </a:r>
           </a:p>
         </p:txBody>
@@ -14982,13 +14991,13 @@
   <p:clrMapOvr>
     <a:masterClrMapping/>
   </p:clrMapOvr>
-  <mc:AlternateContent xmlns:mc="http://schemas.openxmlformats.org/markup-compatibility/2006">
-    <mc:Choice xmlns:p159="http://schemas.microsoft.com/office/powerpoint/2015/09/main" Requires="p159">
+  <mc:AlternateContent xmlns:mc="http://schemas.openxmlformats.org/markup-compatibility/2006" xmlns:p159="http://schemas.microsoft.com/office/powerpoint/2015/09/main">
+    <mc:Choice Requires="p159">
       <p:transition xmlns:p14="http://schemas.microsoft.com/office/powerpoint/2010/main" spd="slow" p14:dur="2000">
         <p159:morph option="byObject"/>
       </p:transition>
     </mc:Choice>
-    <mc:Fallback>
+    <mc:Fallback xmlns="">
       <p:transition spd="slow">
         <p:fade/>
       </p:transition>
@@ -15136,13 +15145,13 @@
   <p:clrMapOvr>
     <a:masterClrMapping/>
   </p:clrMapOvr>
-  <mc:AlternateContent xmlns:mc="http://schemas.openxmlformats.org/markup-compatibility/2006">
-    <mc:Choice xmlns:p159="http://schemas.microsoft.com/office/powerpoint/2015/09/main" Requires="p159">
+  <mc:AlternateContent xmlns:mc="http://schemas.openxmlformats.org/markup-compatibility/2006" xmlns:p159="http://schemas.microsoft.com/office/powerpoint/2015/09/main">
+    <mc:Choice Requires="p159">
       <p:transition xmlns:p14="http://schemas.microsoft.com/office/powerpoint/2010/main" spd="slow" p14:dur="2000">
         <p159:morph option="byObject"/>
       </p:transition>
     </mc:Choice>
-    <mc:Fallback>
+    <mc:Fallback xmlns="">
       <p:transition spd="slow">
         <p:fade/>
       </p:transition>
@@ -15252,13 +15261,13 @@
   <p:clrMapOvr>
     <a:masterClrMapping/>
   </p:clrMapOvr>
-  <mc:AlternateContent xmlns:mc="http://schemas.openxmlformats.org/markup-compatibility/2006">
-    <mc:Choice xmlns:p159="http://schemas.microsoft.com/office/powerpoint/2015/09/main" Requires="p159">
+  <mc:AlternateContent xmlns:mc="http://schemas.openxmlformats.org/markup-compatibility/2006" xmlns:p159="http://schemas.microsoft.com/office/powerpoint/2015/09/main">
+    <mc:Choice Requires="p159">
       <p:transition xmlns:p14="http://schemas.microsoft.com/office/powerpoint/2010/main" spd="slow" p14:dur="2000">
         <p159:morph option="byObject"/>
       </p:transition>
     </mc:Choice>
-    <mc:Fallback>
+    <mc:Fallback xmlns="">
       <p:transition spd="slow">
         <p:fade/>
       </p:transition>
@@ -15330,13 +15339,13 @@
   <p:clrMapOvr>
     <a:masterClrMapping/>
   </p:clrMapOvr>
-  <mc:AlternateContent xmlns:mc="http://schemas.openxmlformats.org/markup-compatibility/2006">
-    <mc:Choice xmlns:p159="http://schemas.microsoft.com/office/powerpoint/2015/09/main" Requires="p159">
+  <mc:AlternateContent xmlns:mc="http://schemas.openxmlformats.org/markup-compatibility/2006" xmlns:p159="http://schemas.microsoft.com/office/powerpoint/2015/09/main">
+    <mc:Choice Requires="p159">
       <p:transition xmlns:p14="http://schemas.microsoft.com/office/powerpoint/2010/main" spd="slow" p14:dur="2000">
         <p159:morph option="byObject"/>
       </p:transition>
     </mc:Choice>
-    <mc:Fallback>
+    <mc:Fallback xmlns="">
       <p:transition spd="slow">
         <p:fade/>
       </p:transition>
@@ -15492,13 +15501,13 @@
   <p:clrMapOvr>
     <a:masterClrMapping/>
   </p:clrMapOvr>
-  <mc:AlternateContent xmlns:mc="http://schemas.openxmlformats.org/markup-compatibility/2006">
-    <mc:Choice xmlns:p159="http://schemas.microsoft.com/office/powerpoint/2015/09/main" Requires="p159">
+  <mc:AlternateContent xmlns:mc="http://schemas.openxmlformats.org/markup-compatibility/2006" xmlns:p159="http://schemas.microsoft.com/office/powerpoint/2015/09/main">
+    <mc:Choice Requires="p159">
       <p:transition xmlns:p14="http://schemas.microsoft.com/office/powerpoint/2010/main" spd="slow" p14:dur="2000">
         <p159:morph option="byObject"/>
       </p:transition>
     </mc:Choice>
-    <mc:Fallback>
+    <mc:Fallback xmlns="">
       <p:transition spd="slow">
         <p:fade/>
       </p:transition>
@@ -15637,13 +15646,13 @@
   <p:clrMapOvr>
     <a:masterClrMapping/>
   </p:clrMapOvr>
-  <mc:AlternateContent xmlns:mc="http://schemas.openxmlformats.org/markup-compatibility/2006">
-    <mc:Choice xmlns:p159="http://schemas.microsoft.com/office/powerpoint/2015/09/main" Requires="p159">
+  <mc:AlternateContent xmlns:mc="http://schemas.openxmlformats.org/markup-compatibility/2006" xmlns:p159="http://schemas.microsoft.com/office/powerpoint/2015/09/main">
+    <mc:Choice Requires="p159">
       <p:transition xmlns:p14="http://schemas.microsoft.com/office/powerpoint/2010/main" spd="slow" p14:dur="2000">
         <p159:morph option="byObject"/>
       </p:transition>
     </mc:Choice>
-    <mc:Fallback>
+    <mc:Fallback xmlns="">
       <p:transition spd="slow">
         <p:fade/>
       </p:transition>
@@ -15773,13 +15782,13 @@
   <p:clrMapOvr>
     <a:masterClrMapping/>
   </p:clrMapOvr>
-  <mc:AlternateContent xmlns:mc="http://schemas.openxmlformats.org/markup-compatibility/2006">
-    <mc:Choice xmlns:p159="http://schemas.microsoft.com/office/powerpoint/2015/09/main" Requires="p159">
+  <mc:AlternateContent xmlns:mc="http://schemas.openxmlformats.org/markup-compatibility/2006" xmlns:p159="http://schemas.microsoft.com/office/powerpoint/2015/09/main">
+    <mc:Choice Requires="p159">
       <p:transition xmlns:p14="http://schemas.microsoft.com/office/powerpoint/2010/main" spd="slow" p14:dur="2000">
         <p159:morph option="byObject"/>
       </p:transition>
     </mc:Choice>
-    <mc:Fallback>
+    <mc:Fallback xmlns="">
       <p:transition spd="slow">
         <p:fade/>
       </p:transition>
@@ -15904,13 +15913,13 @@
   <p:clrMapOvr>
     <a:masterClrMapping/>
   </p:clrMapOvr>
-  <mc:AlternateContent xmlns:mc="http://schemas.openxmlformats.org/markup-compatibility/2006">
-    <mc:Choice xmlns:p159="http://schemas.microsoft.com/office/powerpoint/2015/09/main" Requires="p159">
+  <mc:AlternateContent xmlns:mc="http://schemas.openxmlformats.org/markup-compatibility/2006" xmlns:p159="http://schemas.microsoft.com/office/powerpoint/2015/09/main">
+    <mc:Choice Requires="p159">
       <p:transition xmlns:p14="http://schemas.microsoft.com/office/powerpoint/2010/main" spd="slow" p14:dur="2000">
         <p159:morph option="byObject"/>
       </p:transition>
     </mc:Choice>
-    <mc:Fallback>
+    <mc:Fallback xmlns="">
       <p:transition spd="slow">
         <p:fade/>
       </p:transition>
@@ -16035,13 +16044,13 @@
   <p:clrMapOvr>
     <a:masterClrMapping/>
   </p:clrMapOvr>
-  <mc:AlternateContent xmlns:mc="http://schemas.openxmlformats.org/markup-compatibility/2006">
-    <mc:Choice xmlns:p159="http://schemas.microsoft.com/office/powerpoint/2015/09/main" Requires="p159">
+  <mc:AlternateContent xmlns:mc="http://schemas.openxmlformats.org/markup-compatibility/2006" xmlns:p159="http://schemas.microsoft.com/office/powerpoint/2015/09/main">
+    <mc:Choice Requires="p159">
       <p:transition xmlns:p14="http://schemas.microsoft.com/office/powerpoint/2010/main" spd="slow" p14:dur="2000">
         <p159:morph option="byObject"/>
       </p:transition>
     </mc:Choice>
-    <mc:Fallback>
+    <mc:Fallback xmlns="">
       <p:transition spd="slow">
         <p:fade/>
       </p:transition>
@@ -16111,13 +16120,13 @@
   <p:clrMapOvr>
     <a:masterClrMapping/>
   </p:clrMapOvr>
-  <mc:AlternateContent xmlns:mc="http://schemas.openxmlformats.org/markup-compatibility/2006">
-    <mc:Choice xmlns:p159="http://schemas.microsoft.com/office/powerpoint/2015/09/main" Requires="p159">
+  <mc:AlternateContent xmlns:mc="http://schemas.openxmlformats.org/markup-compatibility/2006" xmlns:p159="http://schemas.microsoft.com/office/powerpoint/2015/09/main">
+    <mc:Choice Requires="p159">
       <p:transition xmlns:p14="http://schemas.microsoft.com/office/powerpoint/2010/main" spd="slow" p14:dur="2000">
         <p159:morph option="byObject"/>
       </p:transition>
     </mc:Choice>
-    <mc:Fallback>
+    <mc:Fallback xmlns="">
       <p:transition spd="slow">
         <p:fade/>
       </p:transition>
@@ -16245,13 +16254,13 @@
   <p:clrMapOvr>
     <a:masterClrMapping/>
   </p:clrMapOvr>
-  <mc:AlternateContent xmlns:mc="http://schemas.openxmlformats.org/markup-compatibility/2006">
-    <mc:Choice xmlns:p159="http://schemas.microsoft.com/office/powerpoint/2015/09/main" Requires="p159">
+  <mc:AlternateContent xmlns:mc="http://schemas.openxmlformats.org/markup-compatibility/2006" xmlns:p159="http://schemas.microsoft.com/office/powerpoint/2015/09/main">
+    <mc:Choice Requires="p159">
       <p:transition xmlns:p14="http://schemas.microsoft.com/office/powerpoint/2010/main" spd="slow" p14:dur="2000">
         <p159:morph option="byObject"/>
       </p:transition>
     </mc:Choice>
-    <mc:Fallback>
+    <mc:Fallback xmlns="">
       <p:transition spd="slow">
         <p:fade/>
       </p:transition>

--- a/HMZ-rt.pptx
+++ b/HMZ-rt.pptx
@@ -4486,13 +4486,13 @@
   <p:clrMapOvr>
     <a:masterClrMapping/>
   </p:clrMapOvr>
-  <mc:AlternateContent xmlns:mc="http://schemas.openxmlformats.org/markup-compatibility/2006" xmlns:p159="http://schemas.microsoft.com/office/powerpoint/2015/09/main">
-    <mc:Choice Requires="p159">
+  <mc:AlternateContent xmlns:mc="http://schemas.openxmlformats.org/markup-compatibility/2006">
+    <mc:Choice xmlns:p159="http://schemas.microsoft.com/office/powerpoint/2015/09/main" xmlns="" Requires="p159">
       <p:transition xmlns:p14="http://schemas.microsoft.com/office/powerpoint/2010/main" spd="slow" p14:dur="2000">
         <p159:morph option="byObject"/>
       </p:transition>
     </mc:Choice>
-    <mc:Fallback xmlns="">
+    <mc:Fallback>
       <p:transition spd="slow">
         <p:fade/>
       </p:transition>
@@ -4755,13 +4755,13 @@
   <p:clrMapOvr>
     <a:masterClrMapping/>
   </p:clrMapOvr>
-  <mc:AlternateContent xmlns:mc="http://schemas.openxmlformats.org/markup-compatibility/2006" xmlns:p159="http://schemas.microsoft.com/office/powerpoint/2015/09/main">
-    <mc:Choice Requires="p159">
+  <mc:AlternateContent xmlns:mc="http://schemas.openxmlformats.org/markup-compatibility/2006">
+    <mc:Choice xmlns:p159="http://schemas.microsoft.com/office/powerpoint/2015/09/main" xmlns="" Requires="p159">
       <p:transition xmlns:p14="http://schemas.microsoft.com/office/powerpoint/2010/main" spd="slow" p14:dur="2000">
         <p159:morph option="byObject"/>
       </p:transition>
     </mc:Choice>
-    <mc:Fallback xmlns="">
+    <mc:Fallback>
       <p:transition spd="slow">
         <p:fade/>
       </p:transition>
@@ -4963,13 +4963,13 @@
   <p:clrMapOvr>
     <a:masterClrMapping/>
   </p:clrMapOvr>
-  <mc:AlternateContent xmlns:mc="http://schemas.openxmlformats.org/markup-compatibility/2006" xmlns:p159="http://schemas.microsoft.com/office/powerpoint/2015/09/main">
-    <mc:Choice Requires="p159">
+  <mc:AlternateContent xmlns:mc="http://schemas.openxmlformats.org/markup-compatibility/2006">
+    <mc:Choice xmlns:p159="http://schemas.microsoft.com/office/powerpoint/2015/09/main" xmlns="" Requires="p159">
       <p:transition xmlns:p14="http://schemas.microsoft.com/office/powerpoint/2010/main" spd="slow" p14:dur="2000">
         <p159:morph option="byObject"/>
       </p:transition>
     </mc:Choice>
-    <mc:Fallback xmlns="">
+    <mc:Fallback>
       <p:transition spd="slow">
         <p:fade/>
       </p:transition>
@@ -5476,13 +5476,13 @@
   <p:clrMapOvr>
     <a:masterClrMapping/>
   </p:clrMapOvr>
-  <mc:AlternateContent xmlns:mc="http://schemas.openxmlformats.org/markup-compatibility/2006" xmlns:p159="http://schemas.microsoft.com/office/powerpoint/2015/09/main">
-    <mc:Choice Requires="p159">
+  <mc:AlternateContent xmlns:mc="http://schemas.openxmlformats.org/markup-compatibility/2006">
+    <mc:Choice xmlns:p159="http://schemas.microsoft.com/office/powerpoint/2015/09/main" xmlns="" Requires="p159">
       <p:transition xmlns:p14="http://schemas.microsoft.com/office/powerpoint/2010/main" spd="slow" p14:dur="2000">
         <p159:morph option="byObject"/>
       </p:transition>
     </mc:Choice>
-    <mc:Fallback xmlns="">
+    <mc:Fallback>
       <p:transition spd="slow">
         <p:fade/>
       </p:transition>
@@ -5684,13 +5684,13 @@
   <p:clrMapOvr>
     <a:masterClrMapping/>
   </p:clrMapOvr>
-  <mc:AlternateContent xmlns:mc="http://schemas.openxmlformats.org/markup-compatibility/2006" xmlns:p159="http://schemas.microsoft.com/office/powerpoint/2015/09/main">
-    <mc:Choice Requires="p159">
+  <mc:AlternateContent xmlns:mc="http://schemas.openxmlformats.org/markup-compatibility/2006">
+    <mc:Choice xmlns:p159="http://schemas.microsoft.com/office/powerpoint/2015/09/main" xmlns="" Requires="p159">
       <p:transition xmlns:p14="http://schemas.microsoft.com/office/powerpoint/2010/main" spd="slow" p14:dur="2000">
         <p159:morph option="byObject"/>
       </p:transition>
     </mc:Choice>
-    <mc:Fallback xmlns="">
+    <mc:Fallback>
       <p:transition spd="slow">
         <p:fade/>
       </p:transition>
@@ -6242,13 +6242,13 @@
   <p:clrMapOvr>
     <a:masterClrMapping/>
   </p:clrMapOvr>
-  <mc:AlternateContent xmlns:mc="http://schemas.openxmlformats.org/markup-compatibility/2006" xmlns:p159="http://schemas.microsoft.com/office/powerpoint/2015/09/main">
-    <mc:Choice Requires="p159">
+  <mc:AlternateContent xmlns:mc="http://schemas.openxmlformats.org/markup-compatibility/2006">
+    <mc:Choice xmlns:p159="http://schemas.microsoft.com/office/powerpoint/2015/09/main" xmlns="" Requires="p159">
       <p:transition xmlns:p14="http://schemas.microsoft.com/office/powerpoint/2010/main" spd="slow" p14:dur="2000">
         <p159:morph option="byObject"/>
       </p:transition>
     </mc:Choice>
-    <mc:Fallback xmlns="">
+    <mc:Fallback>
       <p:transition spd="slow">
         <p:fade/>
       </p:transition>
@@ -6974,13 +6974,13 @@
   <p:clrMapOvr>
     <a:masterClrMapping/>
   </p:clrMapOvr>
-  <mc:AlternateContent xmlns:mc="http://schemas.openxmlformats.org/markup-compatibility/2006" xmlns:p159="http://schemas.microsoft.com/office/powerpoint/2015/09/main">
-    <mc:Choice Requires="p159">
+  <mc:AlternateContent xmlns:mc="http://schemas.openxmlformats.org/markup-compatibility/2006">
+    <mc:Choice xmlns:p159="http://schemas.microsoft.com/office/powerpoint/2015/09/main" xmlns="" Requires="p159">
       <p:transition xmlns:p14="http://schemas.microsoft.com/office/powerpoint/2010/main" spd="slow" p14:dur="2000">
         <p159:morph option="byObject"/>
       </p:transition>
     </mc:Choice>
-    <mc:Fallback xmlns="">
+    <mc:Fallback>
       <p:transition spd="slow">
         <p:fade/>
       </p:transition>
@@ -7156,13 +7156,13 @@
   <p:clrMapOvr>
     <a:masterClrMapping/>
   </p:clrMapOvr>
-  <mc:AlternateContent xmlns:mc="http://schemas.openxmlformats.org/markup-compatibility/2006" xmlns:p159="http://schemas.microsoft.com/office/powerpoint/2015/09/main">
-    <mc:Choice Requires="p159">
+  <mc:AlternateContent xmlns:mc="http://schemas.openxmlformats.org/markup-compatibility/2006">
+    <mc:Choice xmlns:p159="http://schemas.microsoft.com/office/powerpoint/2015/09/main" xmlns="" Requires="p159">
       <p:transition xmlns:p14="http://schemas.microsoft.com/office/powerpoint/2010/main" spd="slow" p14:dur="2000">
         <p159:morph option="byObject"/>
       </p:transition>
     </mc:Choice>
-    <mc:Fallback xmlns="">
+    <mc:Fallback>
       <p:transition spd="slow">
         <p:fade/>
       </p:transition>
@@ -7348,13 +7348,13 @@
   <p:clrMapOvr>
     <a:masterClrMapping/>
   </p:clrMapOvr>
-  <mc:AlternateContent xmlns:mc="http://schemas.openxmlformats.org/markup-compatibility/2006" xmlns:p159="http://schemas.microsoft.com/office/powerpoint/2015/09/main">
-    <mc:Choice Requires="p159">
+  <mc:AlternateContent xmlns:mc="http://schemas.openxmlformats.org/markup-compatibility/2006">
+    <mc:Choice xmlns:p159="http://schemas.microsoft.com/office/powerpoint/2015/09/main" xmlns="" Requires="p159">
       <p:transition xmlns:p14="http://schemas.microsoft.com/office/powerpoint/2010/main" spd="slow" p14:dur="2000">
         <p159:morph option="byObject"/>
       </p:transition>
     </mc:Choice>
-    <mc:Fallback xmlns="">
+    <mc:Fallback>
       <p:transition spd="slow">
         <p:fade/>
       </p:transition>
@@ -7530,13 +7530,13 @@
   <p:clrMapOvr>
     <a:masterClrMapping/>
   </p:clrMapOvr>
-  <mc:AlternateContent xmlns:mc="http://schemas.openxmlformats.org/markup-compatibility/2006" xmlns:p159="http://schemas.microsoft.com/office/powerpoint/2015/09/main">
-    <mc:Choice Requires="p159">
+  <mc:AlternateContent xmlns:mc="http://schemas.openxmlformats.org/markup-compatibility/2006">
+    <mc:Choice xmlns:p159="http://schemas.microsoft.com/office/powerpoint/2015/09/main" xmlns="" Requires="p159">
       <p:transition xmlns:p14="http://schemas.microsoft.com/office/powerpoint/2010/main" spd="slow" p14:dur="2000">
         <p159:morph option="byObject"/>
       </p:transition>
     </mc:Choice>
-    <mc:Fallback xmlns="">
+    <mc:Fallback>
       <p:transition spd="slow">
         <p:fade/>
       </p:transition>
@@ -7792,13 +7792,13 @@
   <p:clrMapOvr>
     <a:masterClrMapping/>
   </p:clrMapOvr>
-  <mc:AlternateContent xmlns:mc="http://schemas.openxmlformats.org/markup-compatibility/2006" xmlns:p159="http://schemas.microsoft.com/office/powerpoint/2015/09/main">
-    <mc:Choice Requires="p159">
+  <mc:AlternateContent xmlns:mc="http://schemas.openxmlformats.org/markup-compatibility/2006">
+    <mc:Choice xmlns:p159="http://schemas.microsoft.com/office/powerpoint/2015/09/main" xmlns="" Requires="p159">
       <p:transition xmlns:p14="http://schemas.microsoft.com/office/powerpoint/2010/main" spd="slow" p14:dur="2000">
         <p159:morph option="byObject"/>
       </p:transition>
     </mc:Choice>
-    <mc:Fallback xmlns="">
+    <mc:Fallback>
       <p:transition spd="slow">
         <p:fade/>
       </p:transition>
@@ -8036,13 +8036,13 @@
   <p:clrMapOvr>
     <a:masterClrMapping/>
   </p:clrMapOvr>
-  <mc:AlternateContent xmlns:mc="http://schemas.openxmlformats.org/markup-compatibility/2006" xmlns:p159="http://schemas.microsoft.com/office/powerpoint/2015/09/main">
-    <mc:Choice Requires="p159">
+  <mc:AlternateContent xmlns:mc="http://schemas.openxmlformats.org/markup-compatibility/2006">
+    <mc:Choice xmlns:p159="http://schemas.microsoft.com/office/powerpoint/2015/09/main" xmlns="" Requires="p159">
       <p:transition xmlns:p14="http://schemas.microsoft.com/office/powerpoint/2010/main" spd="slow" p14:dur="2000">
         <p159:morph option="byObject"/>
       </p:transition>
     </mc:Choice>
-    <mc:Fallback xmlns="">
+    <mc:Fallback>
       <p:transition spd="slow">
         <p:fade/>
       </p:transition>
@@ -8429,13 +8429,13 @@
   <p:clrMapOvr>
     <a:masterClrMapping/>
   </p:clrMapOvr>
-  <mc:AlternateContent xmlns:mc="http://schemas.openxmlformats.org/markup-compatibility/2006" xmlns:p159="http://schemas.microsoft.com/office/powerpoint/2015/09/main">
-    <mc:Choice Requires="p159">
+  <mc:AlternateContent xmlns:mc="http://schemas.openxmlformats.org/markup-compatibility/2006">
+    <mc:Choice xmlns:p159="http://schemas.microsoft.com/office/powerpoint/2015/09/main" xmlns="" Requires="p159">
       <p:transition xmlns:p14="http://schemas.microsoft.com/office/powerpoint/2010/main" spd="slow" p14:dur="2000">
         <p159:morph option="byObject"/>
       </p:transition>
     </mc:Choice>
-    <mc:Fallback xmlns="">
+    <mc:Fallback>
       <p:transition spd="slow">
         <p:fade/>
       </p:transition>
@@ -8559,13 +8559,13 @@
   <p:clrMapOvr>
     <a:masterClrMapping/>
   </p:clrMapOvr>
-  <mc:AlternateContent xmlns:mc="http://schemas.openxmlformats.org/markup-compatibility/2006" xmlns:p159="http://schemas.microsoft.com/office/powerpoint/2015/09/main">
-    <mc:Choice Requires="p159">
+  <mc:AlternateContent xmlns:mc="http://schemas.openxmlformats.org/markup-compatibility/2006">
+    <mc:Choice xmlns:p159="http://schemas.microsoft.com/office/powerpoint/2015/09/main" xmlns="" Requires="p159">
       <p:transition xmlns:p14="http://schemas.microsoft.com/office/powerpoint/2010/main" spd="slow" p14:dur="2000">
         <p159:morph option="byObject"/>
       </p:transition>
     </mc:Choice>
-    <mc:Fallback xmlns="">
+    <mc:Fallback>
       <p:transition spd="slow">
         <p:fade/>
       </p:transition>
@@ -8666,13 +8666,13 @@
   <p:clrMapOvr>
     <a:masterClrMapping/>
   </p:clrMapOvr>
-  <mc:AlternateContent xmlns:mc="http://schemas.openxmlformats.org/markup-compatibility/2006" xmlns:p159="http://schemas.microsoft.com/office/powerpoint/2015/09/main">
-    <mc:Choice Requires="p159">
+  <mc:AlternateContent xmlns:mc="http://schemas.openxmlformats.org/markup-compatibility/2006">
+    <mc:Choice xmlns:p159="http://schemas.microsoft.com/office/powerpoint/2015/09/main" xmlns="" Requires="p159">
       <p:transition xmlns:p14="http://schemas.microsoft.com/office/powerpoint/2010/main" spd="slow" p14:dur="2000">
         <p159:morph option="byObject"/>
       </p:transition>
     </mc:Choice>
-    <mc:Fallback xmlns="">
+    <mc:Fallback>
       <p:transition spd="slow">
         <p:fade/>
       </p:transition>
@@ -8927,13 +8927,13 @@
   <p:clrMapOvr>
     <a:masterClrMapping/>
   </p:clrMapOvr>
-  <mc:AlternateContent xmlns:mc="http://schemas.openxmlformats.org/markup-compatibility/2006" xmlns:p159="http://schemas.microsoft.com/office/powerpoint/2015/09/main">
-    <mc:Choice Requires="p159">
+  <mc:AlternateContent xmlns:mc="http://schemas.openxmlformats.org/markup-compatibility/2006">
+    <mc:Choice xmlns:p159="http://schemas.microsoft.com/office/powerpoint/2015/09/main" xmlns="" Requires="p159">
       <p:transition xmlns:p14="http://schemas.microsoft.com/office/powerpoint/2010/main" spd="slow" p14:dur="2000">
         <p159:morph option="byObject"/>
       </p:transition>
     </mc:Choice>
-    <mc:Fallback xmlns="">
+    <mc:Fallback>
       <p:transition spd="slow">
         <p:fade/>
       </p:transition>
@@ -9219,13 +9219,13 @@
   <p:clrMapOvr>
     <a:masterClrMapping/>
   </p:clrMapOvr>
-  <mc:AlternateContent xmlns:mc="http://schemas.openxmlformats.org/markup-compatibility/2006" xmlns:p159="http://schemas.microsoft.com/office/powerpoint/2015/09/main">
-    <mc:Choice Requires="p159">
+  <mc:AlternateContent xmlns:mc="http://schemas.openxmlformats.org/markup-compatibility/2006">
+    <mc:Choice xmlns:p159="http://schemas.microsoft.com/office/powerpoint/2015/09/main" xmlns="" Requires="p159">
       <p:transition xmlns:p14="http://schemas.microsoft.com/office/powerpoint/2010/main" spd="slow" p14:dur="2000">
         <p159:morph option="byObject"/>
       </p:transition>
     </mc:Choice>
-    <mc:Fallback xmlns="">
+    <mc:Fallback>
       <p:transition spd="slow">
         <p:fade/>
       </p:transition>
@@ -12351,13 +12351,13 @@
     <p:sldLayoutId id="2147483694" r:id="rId16"/>
     <p:sldLayoutId id="2147483695" r:id="rId17"/>
   </p:sldLayoutIdLst>
-  <mc:AlternateContent xmlns:mc="http://schemas.openxmlformats.org/markup-compatibility/2006" xmlns:p159="http://schemas.microsoft.com/office/powerpoint/2015/09/main">
-    <mc:Choice Requires="p159">
+  <mc:AlternateContent xmlns:mc="http://schemas.openxmlformats.org/markup-compatibility/2006">
+    <mc:Choice xmlns:p159="http://schemas.microsoft.com/office/powerpoint/2015/09/main" xmlns="" Requires="p159">
       <p:transition xmlns:p14="http://schemas.microsoft.com/office/powerpoint/2010/main" spd="slow" p14:dur="2000">
         <p159:morph option="byObject"/>
       </p:transition>
     </mc:Choice>
-    <mc:Fallback xmlns="">
+    <mc:Fallback>
       <p:transition spd="slow">
         <p:fade/>
       </p:transition>
@@ -12708,6 +12708,10 @@
               <a:rPr lang="hu-HU" dirty="0" err="1"/>
               <a:t>rt</a:t>
             </a:r>
+            <a:r>
+              <a:rPr lang="hu-HU" dirty="0"/>
+              <a:t/>
+            </a:r>
             <a:br>
               <a:rPr lang="hu-HU" dirty="0"/>
             </a:br>
@@ -12771,18 +12775,25 @@
   <p:clrMapOvr>
     <a:masterClrMapping/>
   </p:clrMapOvr>
-  <mc:AlternateContent xmlns:mc="http://schemas.openxmlformats.org/markup-compatibility/2006" xmlns:p159="http://schemas.microsoft.com/office/powerpoint/2015/09/main">
-    <mc:Choice Requires="p159">
+  <mc:AlternateContent xmlns:mc="http://schemas.openxmlformats.org/markup-compatibility/2006">
+    <mc:Choice xmlns:p159="http://schemas.microsoft.com/office/powerpoint/2015/09/main" xmlns="" Requires="p159">
       <p:transition xmlns:p14="http://schemas.microsoft.com/office/powerpoint/2010/main" spd="slow" p14:dur="2000">
         <p159:morph option="byObject"/>
       </p:transition>
     </mc:Choice>
-    <mc:Fallback xmlns="">
+    <mc:Fallback>
       <p:transition spd="slow">
         <p:fade/>
       </p:transition>
     </mc:Fallback>
   </mc:AlternateContent>
+  <p:timing>
+    <p:tnLst>
+      <p:par>
+        <p:cTn id="1" dur="indefinite" restart="never" nodeType="tmRoot"/>
+      </p:par>
+    </p:tnLst>
+  </p:timing>
 </p:sld>
 </file>
 
@@ -12852,7 +12863,7 @@
         <p:spPr/>
         <p:txBody>
           <a:bodyPr>
-            <a:normAutofit fontScale="92500"/>
+            <a:normAutofit fontScale="92500" lnSpcReduction="10000"/>
           </a:bodyPr>
           <a:lstStyle/>
           <a:p>
@@ -12939,18 +12950,25 @@
   <p:clrMapOvr>
     <a:masterClrMapping/>
   </p:clrMapOvr>
-  <mc:AlternateContent xmlns:mc="http://schemas.openxmlformats.org/markup-compatibility/2006" xmlns:p159="http://schemas.microsoft.com/office/powerpoint/2015/09/main">
-    <mc:Choice Requires="p159">
+  <mc:AlternateContent xmlns:mc="http://schemas.openxmlformats.org/markup-compatibility/2006">
+    <mc:Choice xmlns:p159="http://schemas.microsoft.com/office/powerpoint/2015/09/main" xmlns="" Requires="p159">
       <p:transition xmlns:p14="http://schemas.microsoft.com/office/powerpoint/2010/main" spd="slow" p14:dur="2000">
         <p159:morph option="byObject"/>
       </p:transition>
     </mc:Choice>
-    <mc:Fallback xmlns="">
+    <mc:Fallback>
       <p:transition spd="slow">
         <p:fade/>
       </p:transition>
     </mc:Fallback>
   </mc:AlternateContent>
+  <p:timing>
+    <p:tnLst>
+      <p:par>
+        <p:cTn id="1" dur="indefinite" restart="never" nodeType="tmRoot"/>
+      </p:par>
+    </p:tnLst>
+  </p:timing>
 </p:sld>
 </file>
 
@@ -13020,20 +13038,25 @@
         <p:spPr/>
         <p:txBody>
           <a:bodyPr>
-            <a:normAutofit lnSpcReduction="10000"/>
+            <a:normAutofit/>
           </a:bodyPr>
           <a:lstStyle/>
           <a:p>
             <a:r>
-              <a:rPr lang="hu-HU" sz="2800" dirty="0"/>
+              <a:rPr lang="hu-HU" sz="2400" dirty="0"/>
               <a:t>A képen az alkalmazás adminisztrációs felületének főmenüje / vezérlőpultja látható.</a:t>
             </a:r>
           </a:p>
           <a:p>
             <a:r>
-              <a:rPr lang="hu-HU" sz="2800" dirty="0"/>
-              <a:t>Innen tudjuk az alkalmazásunk fő funkcióit elérni</a:t>
-            </a:r>
+              <a:rPr lang="hu-HU" sz="2400" dirty="0"/>
+              <a:t>Innen tudjuk az alkalmazásunk fő funkcióit </a:t>
+            </a:r>
+            <a:r>
+              <a:rPr lang="hu-HU" sz="2400" dirty="0" smtClean="0"/>
+              <a:t>elérni.</a:t>
+            </a:r>
+            <a:endParaRPr lang="hu-HU" sz="2400" dirty="0"/>
           </a:p>
           <a:p>
             <a:endParaRPr lang="hu-HU" sz="2800" dirty="0"/>
@@ -13099,13 +13122,13 @@
   <p:clrMapOvr>
     <a:masterClrMapping/>
   </p:clrMapOvr>
-  <mc:AlternateContent xmlns:mc="http://schemas.openxmlformats.org/markup-compatibility/2006" xmlns:p159="http://schemas.microsoft.com/office/powerpoint/2015/09/main">
-    <mc:Choice Requires="p159">
+  <mc:AlternateContent xmlns:mc="http://schemas.openxmlformats.org/markup-compatibility/2006">
+    <mc:Choice xmlns:p159="http://schemas.microsoft.com/office/powerpoint/2015/09/main" xmlns="" Requires="p159">
       <p:transition xmlns:p14="http://schemas.microsoft.com/office/powerpoint/2010/main" spd="slow" p14:dur="2000">
         <p159:morph option="byObject"/>
       </p:transition>
     </mc:Choice>
-    <mc:Fallback xmlns="">
+    <mc:Fallback>
       <p:transition spd="slow">
         <p:fade/>
       </p:transition>
@@ -13147,7 +13170,12 @@
             <p:ph type="title"/>
           </p:nvPr>
         </p:nvSpPr>
-        <p:spPr/>
+        <p:spPr>
+          <a:xfrm>
+            <a:off x="1146705" y="57808"/>
+            <a:ext cx="3856037" cy="1639884"/>
+          </a:xfrm>
+        </p:spPr>
         <p:txBody>
           <a:bodyPr>
             <a:noAutofit/>
@@ -13177,13 +13205,20 @@
             <p:ph type="body" sz="half" idx="2"/>
           </p:nvPr>
         </p:nvSpPr>
-        <p:spPr/>
+        <p:spPr>
+          <a:xfrm>
+            <a:off x="945931" y="1639613"/>
+            <a:ext cx="4056811" cy="4524703"/>
+          </a:xfrm>
+        </p:spPr>
         <p:txBody>
-          <a:bodyPr/>
+          <a:bodyPr>
+            <a:normAutofit lnSpcReduction="10000"/>
+          </a:bodyPr>
           <a:lstStyle/>
           <a:p>
             <a:r>
-              <a:rPr lang="hu-HU" dirty="0"/>
+              <a:rPr lang="hu-HU" sz="2000" dirty="0"/>
               <a:t>Ez a felület a hotel szobáinak adminisztrációját mutatja. Látható egy táblázat a szobák részletes adataival:</a:t>
             </a:r>
           </a:p>
@@ -13193,8 +13228,12 @@
               <a:buChar char="•"/>
             </a:pPr>
             <a:r>
-              <a:rPr lang="hu-HU" dirty="0"/>
-              <a:t>Szobaszám, típus, kapacitás, ár</a:t>
+              <a:rPr lang="hu-HU" sz="2000" dirty="0" smtClean="0"/>
+              <a:t> Szobaszám</a:t>
+            </a:r>
+            <a:r>
+              <a:rPr lang="hu-HU" sz="2000" dirty="0"/>
+              <a:t>, típus, kapacitás, ár</a:t>
             </a:r>
           </a:p>
           <a:p>
@@ -13203,8 +13242,12 @@
               <a:buChar char="•"/>
             </a:pPr>
             <a:r>
-              <a:rPr lang="hu-HU" dirty="0"/>
-              <a:t>Aktuális állapot (pl. foglalt, szabad, takarítás alatt)</a:t>
+              <a:rPr lang="hu-HU" sz="2000" dirty="0" smtClean="0"/>
+              <a:t> Aktuális </a:t>
+            </a:r>
+            <a:r>
+              <a:rPr lang="hu-HU" sz="2000" dirty="0"/>
+              <a:t>állapot (pl. foglalt, szabad, takarítás alatt)</a:t>
             </a:r>
           </a:p>
           <a:p>
@@ -13213,13 +13256,17 @@
               <a:buChar char="•"/>
             </a:pPr>
             <a:r>
-              <a:rPr lang="hu-HU" dirty="0"/>
-              <a:t>Emelet, hozzáadás dátuma és leírás</a:t>
-            </a:r>
-          </a:p>
-          <a:p>
-            <a:r>
-              <a:rPr lang="hu-HU" dirty="0"/>
+              <a:rPr lang="hu-HU" sz="2000" dirty="0" smtClean="0"/>
+              <a:t> Emelet</a:t>
+            </a:r>
+            <a:r>
+              <a:rPr lang="hu-HU" sz="2000" dirty="0"/>
+              <a:t>, hozzáadás dátuma és leírás</a:t>
+            </a:r>
+          </a:p>
+          <a:p>
+            <a:r>
+              <a:rPr lang="hu-HU" sz="2000" dirty="0"/>
               <a:t>A felületen lehetőség van új szoba rögzítésére, meglévők szerkesztésére, törlésére és a lista frissítésére.</a:t>
             </a:r>
           </a:p>
@@ -13287,13 +13334,13 @@
   <p:clrMapOvr>
     <a:masterClrMapping/>
   </p:clrMapOvr>
-  <mc:AlternateContent xmlns:mc="http://schemas.openxmlformats.org/markup-compatibility/2006" xmlns:p159="http://schemas.microsoft.com/office/powerpoint/2015/09/main">
-    <mc:Choice Requires="p159">
+  <mc:AlternateContent xmlns:mc="http://schemas.openxmlformats.org/markup-compatibility/2006">
+    <mc:Choice xmlns:p159="http://schemas.microsoft.com/office/powerpoint/2015/09/main" xmlns="" Requires="p159">
       <p:transition xmlns:p14="http://schemas.microsoft.com/office/powerpoint/2010/main" spd="slow" p14:dur="2000">
         <p159:morph option="byObject"/>
       </p:transition>
     </mc:Choice>
-    <mc:Fallback xmlns="">
+    <mc:Fallback>
       <p:transition spd="slow">
         <p:fade/>
       </p:transition>
@@ -13335,7 +13382,12 @@
             <p:ph type="title"/>
           </p:nvPr>
         </p:nvSpPr>
-        <p:spPr/>
+        <p:spPr>
+          <a:xfrm>
+            <a:off x="1217650" y="176049"/>
+            <a:ext cx="3856037" cy="1639884"/>
+          </a:xfrm>
+        </p:spPr>
         <p:txBody>
           <a:bodyPr>
             <a:normAutofit/>
@@ -13365,32 +13417,80 @@
             <p:ph type="body" sz="half" idx="2"/>
           </p:nvPr>
         </p:nvSpPr>
-        <p:spPr/>
+        <p:spPr>
+          <a:xfrm>
+            <a:off x="1146705" y="1815933"/>
+            <a:ext cx="4891488" cy="3975267"/>
+          </a:xfrm>
+        </p:spPr>
         <p:txBody>
-          <a:bodyPr/>
+          <a:bodyPr>
+            <a:noAutofit/>
+          </a:bodyPr>
           <a:lstStyle/>
           <a:p>
-            <a:r>
-              <a:rPr lang="hu-HU" dirty="0"/>
-              <a:t>1;Ezen a felületen tudjuk mint a szoba, mint a program foglalásokat kezelni</a:t>
-            </a:r>
-          </a:p>
-          <a:p>
-            <a:endParaRPr lang="hu-HU" dirty="0"/>
-          </a:p>
-          <a:p>
-            <a:r>
-              <a:rPr lang="hu-HU" dirty="0"/>
-              <a:t>2; Szobafoglalások kezelése</a:t>
-            </a:r>
-          </a:p>
-          <a:p>
-            <a:endParaRPr lang="hu-HU" dirty="0"/>
-          </a:p>
-          <a:p>
-            <a:r>
-              <a:rPr lang="hu-HU" dirty="0"/>
-              <a:t>3; Programok kezelése</a:t>
+            <a:pPr>
+              <a:spcAft>
+                <a:spcPts val="1200"/>
+              </a:spcAft>
+            </a:pPr>
+            <a:r>
+              <a:rPr lang="hu-HU" sz="2400" dirty="0" smtClean="0"/>
+              <a:t>1</a:t>
+            </a:r>
+            <a:r>
+              <a:rPr lang="hu-HU" sz="2400" dirty="0"/>
+              <a:t>.</a:t>
+            </a:r>
+            <a:r>
+              <a:rPr lang="hu-HU" sz="2400" dirty="0" smtClean="0"/>
+              <a:t> Ezen </a:t>
+            </a:r>
+            <a:r>
+              <a:rPr lang="hu-HU" sz="2400" dirty="0"/>
+              <a:t>a felületen tudjuk mint a szoba, mint a program foglalásokat </a:t>
+            </a:r>
+            <a:r>
+              <a:rPr lang="hu-HU" sz="2400" dirty="0" smtClean="0"/>
+              <a:t>kezelni</a:t>
+            </a:r>
+            <a:endParaRPr lang="hu-HU" sz="2400" dirty="0"/>
+          </a:p>
+          <a:p>
+            <a:pPr>
+              <a:spcAft>
+                <a:spcPts val="1200"/>
+              </a:spcAft>
+            </a:pPr>
+            <a:r>
+              <a:rPr lang="hu-HU" sz="2400" dirty="0" smtClean="0"/>
+              <a:t>2. </a:t>
+            </a:r>
+            <a:r>
+              <a:rPr lang="hu-HU" sz="2400" dirty="0"/>
+              <a:t>Szobafoglalások </a:t>
+            </a:r>
+            <a:r>
+              <a:rPr lang="hu-HU" sz="2400" dirty="0" smtClean="0"/>
+              <a:t>kezelése</a:t>
+            </a:r>
+          </a:p>
+          <a:p>
+            <a:pPr>
+              <a:spcAft>
+                <a:spcPts val="1200"/>
+              </a:spcAft>
+            </a:pPr>
+            <a:endParaRPr lang="hu-HU" sz="2400" dirty="0"/>
+          </a:p>
+          <a:p>
+            <a:r>
+              <a:rPr lang="hu-HU" sz="2400" dirty="0" smtClean="0"/>
+              <a:t>3. </a:t>
+            </a:r>
+            <a:r>
+              <a:rPr lang="hu-HU" sz="2400" dirty="0"/>
+              <a:t>Programok kezelése</a:t>
             </a:r>
           </a:p>
         </p:txBody>
@@ -13412,7 +13512,7 @@
           </p:nvPr>
         </p:nvPicPr>
         <p:blipFill>
-          <a:blip r:embed="rId2">
+          <a:blip r:embed="rId2" cstate="hqprint">
             <a:extLst>
               <a:ext uri="{28A0092B-C50C-407E-A947-70E740481C1C}">
                 <a14:useLocalDpi xmlns:a14="http://schemas.microsoft.com/office/drawing/2010/main" val="0"/>
@@ -13459,7 +13559,7 @@
           <p:nvPr/>
         </p:nvPicPr>
         <p:blipFill>
-          <a:blip r:embed="rId3">
+          <a:blip r:embed="rId3" cstate="hqprint">
             <a:extLst>
               <a:ext uri="{28A0092B-C50C-407E-A947-70E740481C1C}">
                 <a14:useLocalDpi xmlns:a14="http://schemas.microsoft.com/office/drawing/2010/main" val="0"/>
@@ -13506,7 +13606,7 @@
           <p:nvPr/>
         </p:nvPicPr>
         <p:blipFill>
-          <a:blip r:embed="rId4">
+          <a:blip r:embed="rId4" cstate="hqprint">
             <a:extLst>
               <a:ext uri="{28A0092B-C50C-407E-A947-70E740481C1C}">
                 <a14:useLocalDpi xmlns:a14="http://schemas.microsoft.com/office/drawing/2010/main" val="0"/>
@@ -13548,13 +13648,13 @@
   <p:clrMapOvr>
     <a:masterClrMapping/>
   </p:clrMapOvr>
-  <mc:AlternateContent xmlns:mc="http://schemas.openxmlformats.org/markup-compatibility/2006" xmlns:p159="http://schemas.microsoft.com/office/powerpoint/2015/09/main">
-    <mc:Choice Requires="p159">
+  <mc:AlternateContent xmlns:mc="http://schemas.openxmlformats.org/markup-compatibility/2006">
+    <mc:Choice xmlns:p159="http://schemas.microsoft.com/office/powerpoint/2015/09/main" xmlns="" Requires="p159">
       <p:transition xmlns:p14="http://schemas.microsoft.com/office/powerpoint/2010/main" spd="slow" p14:dur="2000">
         <p159:morph option="byObject"/>
       </p:transition>
     </mc:Choice>
-    <mc:Fallback xmlns="">
+    <mc:Fallback>
       <p:transition spd="slow">
         <p:fade/>
       </p:transition>
@@ -13596,7 +13696,12 @@
             <p:ph type="title"/>
           </p:nvPr>
         </p:nvSpPr>
-        <p:spPr/>
+        <p:spPr>
+          <a:xfrm>
+            <a:off x="1146705" y="89339"/>
+            <a:ext cx="3856037" cy="1639884"/>
+          </a:xfrm>
+        </p:spPr>
         <p:txBody>
           <a:bodyPr>
             <a:normAutofit/>
@@ -13658,42 +13763,47 @@
             <p:ph type="body" sz="half" idx="2"/>
           </p:nvPr>
         </p:nvSpPr>
-        <p:spPr/>
+        <p:spPr>
+          <a:xfrm>
+            <a:off x="1146705" y="1729223"/>
+            <a:ext cx="3856037" cy="4061977"/>
+          </a:xfrm>
+        </p:spPr>
         <p:txBody>
           <a:bodyPr>
-            <a:normAutofit/>
+            <a:normAutofit fontScale="92500"/>
           </a:bodyPr>
           <a:lstStyle/>
           <a:p>
             <a:r>
-              <a:rPr lang="hu-HU" sz="2000" dirty="0"/>
+              <a:rPr lang="hu-HU" sz="2400" dirty="0"/>
               <a:t>Ezen a felületen a szállodánk alkalmazottjait tudjuk kezelni</a:t>
             </a:r>
           </a:p>
           <a:p>
-            <a:endParaRPr lang="hu-HU" sz="2000" dirty="0"/>
-          </a:p>
-          <a:p>
-            <a:r>
-              <a:rPr lang="hu-HU" sz="2000" dirty="0"/>
+            <a:endParaRPr lang="hu-HU" sz="2400" dirty="0"/>
+          </a:p>
+          <a:p>
+            <a:r>
+              <a:rPr lang="hu-HU" sz="2400" dirty="0"/>
               <a:t>-Frissíteni</a:t>
             </a:r>
           </a:p>
           <a:p>
             <a:r>
-              <a:rPr lang="hu-HU" sz="2000" dirty="0"/>
+              <a:rPr lang="hu-HU" sz="2400" dirty="0"/>
               <a:t>-Új dolgozót felvenni</a:t>
             </a:r>
           </a:p>
           <a:p>
             <a:r>
-              <a:rPr lang="hu-HU" sz="2000" dirty="0"/>
+              <a:rPr lang="hu-HU" sz="2400" dirty="0"/>
               <a:t>-Dolgozó adatait megváltoztatni</a:t>
             </a:r>
           </a:p>
           <a:p>
             <a:r>
-              <a:rPr lang="hu-HU" sz="2000" dirty="0"/>
+              <a:rPr lang="hu-HU" sz="2400" dirty="0"/>
               <a:t>-Dolgozót törölni / elbocsájtani</a:t>
             </a:r>
           </a:p>
@@ -13712,13 +13822,13 @@
   <p:clrMapOvr>
     <a:masterClrMapping/>
   </p:clrMapOvr>
-  <mc:AlternateContent xmlns:mc="http://schemas.openxmlformats.org/markup-compatibility/2006" xmlns:p159="http://schemas.microsoft.com/office/powerpoint/2015/09/main">
-    <mc:Choice Requires="p159">
+  <mc:AlternateContent xmlns:mc="http://schemas.openxmlformats.org/markup-compatibility/2006">
+    <mc:Choice xmlns:p159="http://schemas.microsoft.com/office/powerpoint/2015/09/main" xmlns="" Requires="p159">
       <p:transition xmlns:p14="http://schemas.microsoft.com/office/powerpoint/2010/main" spd="slow" p14:dur="2000">
         <p159:morph option="byObject"/>
       </p:transition>
     </mc:Choice>
-    <mc:Fallback xmlns="">
+    <mc:Fallback>
       <p:transition spd="slow">
         <p:fade/>
       </p:transition>
@@ -13790,10 +13900,15 @@
             <p:ph type="body" sz="half" idx="2"/>
           </p:nvPr>
         </p:nvSpPr>
-        <p:spPr/>
+        <p:spPr>
+          <a:xfrm>
+            <a:off x="709449" y="2249486"/>
+            <a:ext cx="4293294" cy="3541714"/>
+          </a:xfrm>
+        </p:spPr>
         <p:txBody>
           <a:bodyPr>
-            <a:normAutofit lnSpcReduction="10000"/>
+            <a:normAutofit/>
           </a:bodyPr>
           <a:lstStyle/>
           <a:p>
@@ -13804,27 +13919,31 @@
           </a:p>
           <a:p>
             <a:r>
-              <a:rPr lang="hu-HU" sz="2400" dirty="0"/>
-              <a:t>-szolgáltatásaiba</a:t>
-            </a:r>
-          </a:p>
-          <a:p>
-            <a:r>
-              <a:rPr lang="hu-HU" sz="2400" dirty="0"/>
-              <a:t>-szobáiba</a:t>
-            </a:r>
-          </a:p>
-          <a:p>
-            <a:r>
-              <a:rPr lang="hu-HU" sz="2400" dirty="0"/>
-              <a:t>-programjaiba</a:t>
-            </a:r>
-          </a:p>
-          <a:p>
-            <a:r>
-              <a:rPr lang="hu-HU" sz="2400" dirty="0"/>
-              <a:t>-vendégek véleményébe</a:t>
-            </a:r>
+              <a:rPr lang="hu-HU" sz="2400" dirty="0" smtClean="0"/>
+              <a:t>- szolgáltatásaiba,</a:t>
+            </a:r>
+            <a:endParaRPr lang="hu-HU" sz="2400" dirty="0"/>
+          </a:p>
+          <a:p>
+            <a:r>
+              <a:rPr lang="hu-HU" sz="2400" dirty="0" smtClean="0"/>
+              <a:t>- szobáiba,</a:t>
+            </a:r>
+            <a:endParaRPr lang="hu-HU" sz="2400" dirty="0"/>
+          </a:p>
+          <a:p>
+            <a:r>
+              <a:rPr lang="hu-HU" sz="2400" dirty="0" smtClean="0"/>
+              <a:t>- programjaiba,</a:t>
+            </a:r>
+            <a:endParaRPr lang="hu-HU" sz="2400" dirty="0"/>
+          </a:p>
+          <a:p>
+            <a:r>
+              <a:rPr lang="hu-HU" sz="2400" dirty="0" smtClean="0"/>
+              <a:t>- vendégek véleményébe.</a:t>
+            </a:r>
+            <a:endParaRPr lang="hu-HU" sz="2400" dirty="0"/>
           </a:p>
         </p:txBody>
       </p:sp>
@@ -13859,8 +13978,8 @@
         </p:blipFill>
         <p:spPr bwMode="auto">
           <a:xfrm>
-            <a:off x="5156200" y="1663438"/>
-            <a:ext cx="5891213" cy="3056462"/>
+            <a:off x="4836795" y="1434662"/>
+            <a:ext cx="6821977" cy="3539359"/>
           </a:xfrm>
           <a:prstGeom prst="rect">
             <a:avLst/>
@@ -13887,13 +14006,13 @@
   <p:clrMapOvr>
     <a:masterClrMapping/>
   </p:clrMapOvr>
-  <mc:AlternateContent xmlns:mc="http://schemas.openxmlformats.org/markup-compatibility/2006" xmlns:p159="http://schemas.microsoft.com/office/powerpoint/2015/09/main">
-    <mc:Choice Requires="p159">
+  <mc:AlternateContent xmlns:mc="http://schemas.openxmlformats.org/markup-compatibility/2006">
+    <mc:Choice xmlns:p159="http://schemas.microsoft.com/office/powerpoint/2015/09/main" xmlns="" Requires="p159">
       <p:transition xmlns:p14="http://schemas.microsoft.com/office/powerpoint/2010/main" spd="slow" p14:dur="2000">
         <p159:morph option="byObject"/>
       </p:transition>
     </mc:Choice>
-    <mc:Fallback xmlns="">
+    <mc:Fallback>
       <p:transition spd="slow">
         <p:fade/>
       </p:transition>
@@ -13965,7 +14084,12 @@
             <p:ph type="body" sz="half" idx="2"/>
           </p:nvPr>
         </p:nvSpPr>
-        <p:spPr/>
+        <p:spPr>
+          <a:xfrm>
+            <a:off x="819808" y="2249486"/>
+            <a:ext cx="4114800" cy="3757176"/>
+          </a:xfrm>
+        </p:spPr>
         <p:txBody>
           <a:bodyPr>
             <a:normAutofit/>
@@ -13974,8 +14098,21 @@
           <a:p>
             <a:r>
               <a:rPr lang="hu-HU" sz="2400" dirty="0"/>
-              <a:t>A Szobák oldalon a vendégek megtekinthetik az elérhető szobákat, és igényeik szerint különböző szűrési lehetőségekkel könnyedén megtalálhatják a számukra legmegfelelőbbet</a:t>
-            </a:r>
+              <a:t>A </a:t>
+            </a:r>
+            <a:r>
+              <a:rPr lang="hu-HU" sz="2400" b="1" i="1" dirty="0"/>
+              <a:t>Szobák</a:t>
+            </a:r>
+            <a:r>
+              <a:rPr lang="hu-HU" sz="2400" dirty="0"/>
+              <a:t> oldalon a vendégek megtekinthetik az elérhető szobákat, és igényeik szerint különböző szűrési lehetőségekkel könnyedén megtalálhatják a számukra </a:t>
+            </a:r>
+            <a:r>
+              <a:rPr lang="hu-HU" sz="2400" dirty="0" smtClean="0"/>
+              <a:t>legmegfelelőbbet.</a:t>
+            </a:r>
+            <a:endParaRPr lang="hu-HU" sz="2400" dirty="0"/>
           </a:p>
         </p:txBody>
       </p:sp>
@@ -14010,8 +14147,8 @@
         </p:blipFill>
         <p:spPr bwMode="auto">
           <a:xfrm>
-            <a:off x="5156200" y="1655519"/>
-            <a:ext cx="5891213" cy="3072299"/>
+            <a:off x="4838508" y="1198179"/>
+            <a:ext cx="6768174" cy="3529639"/>
           </a:xfrm>
           <a:prstGeom prst="rect">
             <a:avLst/>
@@ -14038,13 +14175,13 @@
   <p:clrMapOvr>
     <a:masterClrMapping/>
   </p:clrMapOvr>
-  <mc:AlternateContent xmlns:mc="http://schemas.openxmlformats.org/markup-compatibility/2006" xmlns:p159="http://schemas.microsoft.com/office/powerpoint/2015/09/main">
-    <mc:Choice Requires="p159">
+  <mc:AlternateContent xmlns:mc="http://schemas.openxmlformats.org/markup-compatibility/2006">
+    <mc:Choice xmlns:p159="http://schemas.microsoft.com/office/powerpoint/2015/09/main" xmlns="" Requires="p159">
       <p:transition xmlns:p14="http://schemas.microsoft.com/office/powerpoint/2010/main" spd="slow" p14:dur="2000">
         <p159:morph option="byObject"/>
       </p:transition>
     </mc:Choice>
-    <mc:Fallback xmlns="">
+    <mc:Fallback>
       <p:transition spd="slow">
         <p:fade/>
       </p:transition>
@@ -14125,8 +14262,21 @@
           <a:p>
             <a:r>
               <a:rPr lang="hu-HU" sz="2800" dirty="0"/>
-              <a:t>A Szolgáltatások oldalon a látogatók részletesen megismerhetik szállodánk által kínált szolgáltatásokat és lehetőségeket</a:t>
-            </a:r>
+              <a:t>A </a:t>
+            </a:r>
+            <a:r>
+              <a:rPr lang="hu-HU" sz="2800" b="1" i="1" dirty="0"/>
+              <a:t>Szolgáltatások</a:t>
+            </a:r>
+            <a:r>
+              <a:rPr lang="hu-HU" sz="2800" dirty="0"/>
+              <a:t> oldalon a látogatók részletesen megismerhetik szállodánk által kínált szolgáltatásokat és </a:t>
+            </a:r>
+            <a:r>
+              <a:rPr lang="hu-HU" sz="2800" dirty="0" smtClean="0"/>
+              <a:t>lehetőségeket.</a:t>
+            </a:r>
+            <a:endParaRPr lang="hu-HU" sz="2800" dirty="0"/>
           </a:p>
         </p:txBody>
       </p:sp>
@@ -14161,8 +14311,8 @@
         </p:blipFill>
         <p:spPr bwMode="auto">
           <a:xfrm>
-            <a:off x="5156200" y="1663318"/>
-            <a:ext cx="5891213" cy="3056701"/>
+            <a:off x="5156200" y="1363718"/>
+            <a:ext cx="6468637" cy="3356302"/>
           </a:xfrm>
           <a:prstGeom prst="rect">
             <a:avLst/>
@@ -14189,13 +14339,13 @@
   <p:clrMapOvr>
     <a:masterClrMapping/>
   </p:clrMapOvr>
-  <mc:AlternateContent xmlns:mc="http://schemas.openxmlformats.org/markup-compatibility/2006" xmlns:p159="http://schemas.microsoft.com/office/powerpoint/2015/09/main">
-    <mc:Choice Requires="p159">
+  <mc:AlternateContent xmlns:mc="http://schemas.openxmlformats.org/markup-compatibility/2006">
+    <mc:Choice xmlns:p159="http://schemas.microsoft.com/office/powerpoint/2015/09/main" xmlns="" Requires="p159">
       <p:transition xmlns:p14="http://schemas.microsoft.com/office/powerpoint/2010/main" spd="slow" p14:dur="2000">
         <p159:morph option="byObject"/>
       </p:transition>
     </mc:Choice>
-    <mc:Fallback xmlns="">
+    <mc:Fallback>
       <p:transition spd="slow">
         <p:fade/>
       </p:transition>
@@ -14276,8 +14426,21 @@
           <a:p>
             <a:r>
               <a:rPr lang="hu-HU" sz="2800" dirty="0"/>
-              <a:t>A Programok oldalon vendégeink gyermekeknek és felnőtteknek egyaránt szóló, változatos programlehetőségek közül foglalhatnak</a:t>
-            </a:r>
+              <a:t>A </a:t>
+            </a:r>
+            <a:r>
+              <a:rPr lang="hu-HU" sz="2800" b="1" i="1" dirty="0"/>
+              <a:t>Programok</a:t>
+            </a:r>
+            <a:r>
+              <a:rPr lang="hu-HU" sz="2800" dirty="0"/>
+              <a:t> oldalon vendégeink gyermekeknek és felnőtteknek egyaránt szóló, változatos programlehetőségek közül </a:t>
+            </a:r>
+            <a:r>
+              <a:rPr lang="hu-HU" sz="2800" dirty="0" smtClean="0"/>
+              <a:t>foglalhatnak.</a:t>
+            </a:r>
+            <a:endParaRPr lang="hu-HU" sz="2800" dirty="0"/>
           </a:p>
         </p:txBody>
       </p:sp>
@@ -14312,8 +14475,8 @@
         </p:blipFill>
         <p:spPr bwMode="auto">
           <a:xfrm>
-            <a:off x="5156200" y="1658622"/>
-            <a:ext cx="5891213" cy="3066094"/>
+            <a:off x="5156200" y="1379483"/>
+            <a:ext cx="6427552" cy="3345233"/>
           </a:xfrm>
           <a:prstGeom prst="rect">
             <a:avLst/>
@@ -14340,13 +14503,13 @@
   <p:clrMapOvr>
     <a:masterClrMapping/>
   </p:clrMapOvr>
-  <mc:AlternateContent xmlns:mc="http://schemas.openxmlformats.org/markup-compatibility/2006" xmlns:p159="http://schemas.microsoft.com/office/powerpoint/2015/09/main">
-    <mc:Choice Requires="p159">
+  <mc:AlternateContent xmlns:mc="http://schemas.openxmlformats.org/markup-compatibility/2006">
+    <mc:Choice xmlns:p159="http://schemas.microsoft.com/office/powerpoint/2015/09/main" xmlns="" Requires="p159">
       <p:transition xmlns:p14="http://schemas.microsoft.com/office/powerpoint/2010/main" spd="slow" p14:dur="2000">
         <p159:morph option="byObject"/>
       </p:transition>
     </mc:Choice>
-    <mc:Fallback xmlns="">
+    <mc:Fallback>
       <p:transition spd="slow">
         <p:fade/>
       </p:transition>
@@ -14426,8 +14589,8 @@
         </p:blipFill>
         <p:spPr>
           <a:xfrm>
-            <a:off x="5156200" y="1730463"/>
-            <a:ext cx="5891213" cy="2922412"/>
+            <a:off x="5156200" y="1489841"/>
+            <a:ext cx="6376277" cy="3163034"/>
           </a:xfrm>
         </p:spPr>
       </p:pic>
@@ -14456,7 +14619,15 @@
           <a:p>
             <a:r>
               <a:rPr lang="hu-HU" sz="2400" dirty="0"/>
-              <a:t>A Rólunk oldalon a vendégek minden fontos információt megtalálnak szállodánkról, beleértve az elérhetőségeinket, megközelítési lehetőségeket és egyéb hasznos tudnivalókat.</a:t>
+              <a:t>A </a:t>
+            </a:r>
+            <a:r>
+              <a:rPr lang="hu-HU" sz="2400" b="1" i="1" dirty="0"/>
+              <a:t>Rólunk</a:t>
+            </a:r>
+            <a:r>
+              <a:rPr lang="hu-HU" sz="2400" dirty="0"/>
+              <a:t> oldalon a vendégek minden fontos információt megtalálnak szállodánkról, beleértve az elérhetőségeinket, megközelítési lehetőségeket és egyéb hasznos tudnivalókat.</a:t>
             </a:r>
           </a:p>
         </p:txBody>
@@ -14471,13 +14642,13 @@
   <p:clrMapOvr>
     <a:masterClrMapping/>
   </p:clrMapOvr>
-  <mc:AlternateContent xmlns:mc="http://schemas.openxmlformats.org/markup-compatibility/2006" xmlns:p159="http://schemas.microsoft.com/office/powerpoint/2015/09/main">
-    <mc:Choice Requires="p159">
+  <mc:AlternateContent xmlns:mc="http://schemas.openxmlformats.org/markup-compatibility/2006">
+    <mc:Choice xmlns:p159="http://schemas.microsoft.com/office/powerpoint/2015/09/main" xmlns="" Requires="p159">
       <p:transition xmlns:p14="http://schemas.microsoft.com/office/powerpoint/2010/main" spd="slow" p14:dur="2000">
         <p159:morph option="byObject"/>
       </p:transition>
     </mc:Choice>
-    <mc:Fallback xmlns="">
+    <mc:Fallback>
       <p:transition spd="slow">
         <p:fade/>
       </p:transition>
@@ -14602,18 +14773,25 @@
   <p:clrMapOvr>
     <a:masterClrMapping/>
   </p:clrMapOvr>
-  <mc:AlternateContent xmlns:mc="http://schemas.openxmlformats.org/markup-compatibility/2006" xmlns:p159="http://schemas.microsoft.com/office/powerpoint/2015/09/main">
-    <mc:Choice Requires="p159">
+  <mc:AlternateContent xmlns:mc="http://schemas.openxmlformats.org/markup-compatibility/2006">
+    <mc:Choice xmlns:p159="http://schemas.microsoft.com/office/powerpoint/2015/09/main" xmlns="" Requires="p159">
       <p:transition xmlns:p14="http://schemas.microsoft.com/office/powerpoint/2010/main" spd="slow" p14:dur="2000">
         <p159:morph option="byObject"/>
       </p:transition>
     </mc:Choice>
-    <mc:Fallback xmlns="">
+    <mc:Fallback>
       <p:transition spd="slow">
         <p:fade/>
       </p:transition>
     </mc:Fallback>
   </mc:AlternateContent>
+  <p:timing>
+    <p:tnLst>
+      <p:par>
+        <p:cTn id="1" dur="indefinite" restart="never" nodeType="tmRoot"/>
+      </p:par>
+    </p:tnLst>
+  </p:timing>
 </p:sld>
 </file>
 
@@ -14680,7 +14858,12 @@
             <p:ph type="body" sz="half" idx="2"/>
           </p:nvPr>
         </p:nvSpPr>
-        <p:spPr/>
+        <p:spPr>
+          <a:xfrm>
+            <a:off x="977463" y="2249486"/>
+            <a:ext cx="4025280" cy="3541714"/>
+          </a:xfrm>
+        </p:spPr>
         <p:txBody>
           <a:bodyPr>
             <a:normAutofit/>
@@ -14689,8 +14872,25 @@
           <a:p>
             <a:r>
               <a:rPr lang="hu-HU" sz="2400" dirty="0"/>
-              <a:t>A Profilom oldalon a felhasználók megtekinthetik, módosíthatják vagy törölhetik fiókjukkal kapcsolatos adataikat, beállításaikat és egyéb személyes információikat</a:t>
-            </a:r>
+              <a:t>A </a:t>
+            </a:r>
+            <a:r>
+              <a:rPr lang="hu-HU" sz="2400" b="1" i="1" dirty="0"/>
+              <a:t>Profilom</a:t>
+            </a:r>
+            <a:r>
+              <a:rPr lang="hu-HU" sz="2400" dirty="0"/>
+              <a:t> oldalon a felhasználók megtekinthetik, módosíthatják vagy törölhetik fiókjukkal kapcsolatos adataikat, beállításaikat és egyéb személyes </a:t>
+            </a:r>
+            <a:r>
+              <a:rPr lang="hu-HU" sz="2400" dirty="0" err="1" smtClean="0"/>
+              <a:t>információikat</a:t>
+            </a:r>
+            <a:r>
+              <a:rPr lang="hu-HU" sz="2400" dirty="0" smtClean="0"/>
+              <a:t>.</a:t>
+            </a:r>
+            <a:endParaRPr lang="hu-HU" sz="2400" dirty="0"/>
           </a:p>
         </p:txBody>
       </p:sp>
@@ -14725,8 +14925,8 @@
         </p:blipFill>
         <p:spPr bwMode="auto">
           <a:xfrm>
-            <a:off x="5156200" y="1654005"/>
-            <a:ext cx="5891213" cy="3075327"/>
+            <a:off x="5156200" y="1426779"/>
+            <a:ext cx="6326496" cy="3302553"/>
           </a:xfrm>
           <a:prstGeom prst="rect">
             <a:avLst/>
@@ -14753,13 +14953,13 @@
   <p:clrMapOvr>
     <a:masterClrMapping/>
   </p:clrMapOvr>
-  <mc:AlternateContent xmlns:mc="http://schemas.openxmlformats.org/markup-compatibility/2006" xmlns:p159="http://schemas.microsoft.com/office/powerpoint/2015/09/main">
-    <mc:Choice Requires="p159">
+  <mc:AlternateContent xmlns:mc="http://schemas.openxmlformats.org/markup-compatibility/2006">
+    <mc:Choice xmlns:p159="http://schemas.microsoft.com/office/powerpoint/2015/09/main" xmlns="" Requires="p159">
       <p:transition xmlns:p14="http://schemas.microsoft.com/office/powerpoint/2010/main" spd="slow" p14:dur="2000">
         <p159:morph option="byObject"/>
       </p:transition>
     </mc:Choice>
-    <mc:Fallback xmlns="">
+    <mc:Fallback>
       <p:transition spd="slow">
         <p:fade/>
       </p:transition>
@@ -14819,10 +15019,7 @@
             <a:br>
               <a:rPr lang="hu-HU" dirty="0"/>
             </a:br>
-            <a:r>
-              <a:rPr lang="hu-HU" dirty="0"/>
-              <a:t>=&gt;</a:t>
-            </a:r>
+            <a:endParaRPr lang="hu-HU" dirty="0"/>
           </a:p>
         </p:txBody>
       </p:sp>
@@ -14836,13 +15033,13 @@
   <p:clrMapOvr>
     <a:masterClrMapping/>
   </p:clrMapOvr>
-  <mc:AlternateContent xmlns:mc="http://schemas.openxmlformats.org/markup-compatibility/2006" xmlns:p159="http://schemas.microsoft.com/office/powerpoint/2015/09/main">
-    <mc:Choice Requires="p159">
+  <mc:AlternateContent xmlns:mc="http://schemas.openxmlformats.org/markup-compatibility/2006">
+    <mc:Choice xmlns:p159="http://schemas.microsoft.com/office/powerpoint/2015/09/main" xmlns="" Requires="p159">
       <p:transition xmlns:p14="http://schemas.microsoft.com/office/powerpoint/2010/main" spd="slow" p14:dur="2000">
         <p159:morph option="byObject"/>
       </p:transition>
     </mc:Choice>
-    <mc:Fallback xmlns="">
+    <mc:Fallback>
       <p:transition spd="slow">
         <p:fade/>
       </p:transition>
@@ -14917,18 +15114,27 @@
         <p:spPr/>
         <p:txBody>
           <a:bodyPr>
-            <a:normAutofit fontScale="92500"/>
+            <a:normAutofit lnSpcReduction="10000"/>
           </a:bodyPr>
           <a:lstStyle/>
           <a:p>
             <a:r>
-              <a:rPr lang="hu-HU" sz="2800"/>
-              <a:t>A foglalásod </a:t>
-            </a:r>
-            <a:r>
               <a:rPr lang="hu-HU" sz="2800" dirty="0"/>
-              <a:t>megerősítése e-mailben történik – a rendszer visszaigazoló üzenetet küld, amelyben megerősítjük, hogy a foglalásod sikeresen megtörtént</a:t>
-            </a:r>
+              <a:t>A foglalás megerősítése e-mailben történik – a rendszer visszaigazoló üzenetet küld, amelyben megerősítjük, hogy a </a:t>
+            </a:r>
+            <a:r>
+              <a:rPr lang="hu-HU" sz="2800" dirty="0" smtClean="0"/>
+              <a:t>foglalás </a:t>
+            </a:r>
+            <a:r>
+              <a:rPr lang="hu-HU" sz="2800" dirty="0"/>
+              <a:t>sikeresen </a:t>
+            </a:r>
+            <a:r>
+              <a:rPr lang="hu-HU" sz="2800" dirty="0" smtClean="0"/>
+              <a:t>megtörtént.</a:t>
+            </a:r>
+            <a:endParaRPr lang="hu-HU" sz="2800" dirty="0"/>
           </a:p>
         </p:txBody>
       </p:sp>
@@ -14991,13 +15197,13 @@
   <p:clrMapOvr>
     <a:masterClrMapping/>
   </p:clrMapOvr>
-  <mc:AlternateContent xmlns:mc="http://schemas.openxmlformats.org/markup-compatibility/2006" xmlns:p159="http://schemas.microsoft.com/office/powerpoint/2015/09/main">
-    <mc:Choice Requires="p159">
+  <mc:AlternateContent xmlns:mc="http://schemas.openxmlformats.org/markup-compatibility/2006">
+    <mc:Choice xmlns:p159="http://schemas.microsoft.com/office/powerpoint/2015/09/main" xmlns="" Requires="p159">
       <p:transition xmlns:p14="http://schemas.microsoft.com/office/powerpoint/2010/main" spd="slow" p14:dur="2000">
         <p159:morph option="byObject"/>
       </p:transition>
     </mc:Choice>
-    <mc:Fallback xmlns="">
+    <mc:Fallback>
       <p:transition spd="slow">
         <p:fade/>
       </p:transition>
@@ -15075,14 +15281,27 @@
         <p:spPr/>
         <p:txBody>
           <a:bodyPr>
-            <a:normAutofit lnSpcReduction="10000"/>
+            <a:normAutofit/>
           </a:bodyPr>
           <a:lstStyle/>
           <a:p>
             <a:r>
               <a:rPr lang="hu-HU" sz="3200" dirty="0"/>
-              <a:t>Az e-mailben egy PDF fájlt is csatolunk, amely tartalmazza a foglalásod összes fontos adatát és részletét</a:t>
-            </a:r>
+              <a:t>Az e-mailben egy PDF fájlt is csatolunk, amely tartalmazza a </a:t>
+            </a:r>
+            <a:r>
+              <a:rPr lang="hu-HU" sz="3200" dirty="0" smtClean="0"/>
+              <a:t>foglalás </a:t>
+            </a:r>
+            <a:r>
+              <a:rPr lang="hu-HU" sz="3200" dirty="0"/>
+              <a:t>összes fontos adatát és </a:t>
+            </a:r>
+            <a:r>
+              <a:rPr lang="hu-HU" sz="3200" dirty="0" smtClean="0"/>
+              <a:t>részletét.</a:t>
+            </a:r>
+            <a:endParaRPr lang="hu-HU" sz="3200" dirty="0"/>
           </a:p>
         </p:txBody>
       </p:sp>
@@ -15145,13 +15364,13 @@
   <p:clrMapOvr>
     <a:masterClrMapping/>
   </p:clrMapOvr>
-  <mc:AlternateContent xmlns:mc="http://schemas.openxmlformats.org/markup-compatibility/2006" xmlns:p159="http://schemas.microsoft.com/office/powerpoint/2015/09/main">
-    <mc:Choice Requires="p159">
+  <mc:AlternateContent xmlns:mc="http://schemas.openxmlformats.org/markup-compatibility/2006">
+    <mc:Choice xmlns:p159="http://schemas.microsoft.com/office/powerpoint/2015/09/main" xmlns="" Requires="p159">
       <p:transition xmlns:p14="http://schemas.microsoft.com/office/powerpoint/2010/main" spd="slow" p14:dur="2000">
         <p159:morph option="byObject"/>
       </p:transition>
     </mc:Choice>
-    <mc:Fallback xmlns="">
+    <mc:Fallback>
       <p:transition spd="slow">
         <p:fade/>
       </p:transition>
@@ -15223,30 +15442,68 @@
         </p:nvSpPr>
         <p:spPr/>
         <p:txBody>
-          <a:bodyPr/>
+          <a:bodyPr>
+            <a:normAutofit/>
+          </a:bodyPr>
           <a:lstStyle/>
           <a:p>
             <a:r>
-              <a:rPr lang="hu-HU" dirty="0"/>
-              <a:t>-Valós fizetés</a:t>
-            </a:r>
-          </a:p>
-          <a:p>
-            <a:r>
-              <a:rPr lang="hu-HU" dirty="0"/>
-              <a:t>-Profilfelület továbbfejlesztése</a:t>
-            </a:r>
-          </a:p>
-          <a:p>
-            <a:r>
-              <a:rPr lang="hu-HU" dirty="0"/>
-              <a:t>-Értesítések kezelése</a:t>
-            </a:r>
-          </a:p>
-          <a:p>
-            <a:r>
-              <a:rPr lang="hu-HU" dirty="0"/>
-              <a:t>-mobilapplikáció kifejlesztése</a:t>
+              <a:rPr lang="hu-HU" sz="2800" dirty="0"/>
+              <a:t> </a:t>
+            </a:r>
+            <a:r>
+              <a:rPr lang="hu-HU" sz="2800" dirty="0" smtClean="0"/>
+              <a:t>Valós </a:t>
+            </a:r>
+            <a:r>
+              <a:rPr lang="hu-HU" sz="2800" dirty="0"/>
+              <a:t>fizetés</a:t>
+            </a:r>
+          </a:p>
+          <a:p>
+            <a:r>
+              <a:rPr lang="hu-HU" sz="2800" dirty="0"/>
+              <a:t> </a:t>
+            </a:r>
+            <a:r>
+              <a:rPr lang="hu-HU" sz="2800" dirty="0" smtClean="0"/>
+              <a:t>Profilfelület </a:t>
+            </a:r>
+            <a:r>
+              <a:rPr lang="hu-HU" sz="2800" dirty="0"/>
+              <a:t>továbbfejlesztése</a:t>
+            </a:r>
+          </a:p>
+          <a:p>
+            <a:r>
+              <a:rPr lang="hu-HU" sz="2800" dirty="0"/>
+              <a:t> </a:t>
+            </a:r>
+            <a:r>
+              <a:rPr lang="hu-HU" sz="2800" dirty="0" smtClean="0"/>
+              <a:t>Értesítések </a:t>
+            </a:r>
+            <a:r>
+              <a:rPr lang="hu-HU" sz="2800" dirty="0"/>
+              <a:t>kezelése</a:t>
+            </a:r>
+          </a:p>
+          <a:p>
+            <a:r>
+              <a:rPr lang="hu-HU" sz="2800" dirty="0"/>
+              <a:t> </a:t>
+            </a:r>
+            <a:r>
+              <a:rPr lang="hu-HU" sz="2800" dirty="0" smtClean="0"/>
+              <a:t>M</a:t>
+            </a:r>
+            <a:r>
+              <a:rPr lang="hu-HU" sz="2800" dirty="0" smtClean="0"/>
+              <a:t>obilapplikáció </a:t>
+            </a:r>
+            <a:r>
+              <a:rPr lang="hu-HU" sz="2800" dirty="0"/>
+              <a:t>kifejlesztése</a:t>
             </a:r>
           </a:p>
         </p:txBody>
@@ -15261,13 +15518,13 @@
   <p:clrMapOvr>
     <a:masterClrMapping/>
   </p:clrMapOvr>
-  <mc:AlternateContent xmlns:mc="http://schemas.openxmlformats.org/markup-compatibility/2006" xmlns:p159="http://schemas.microsoft.com/office/powerpoint/2015/09/main">
-    <mc:Choice Requires="p159">
+  <mc:AlternateContent xmlns:mc="http://schemas.openxmlformats.org/markup-compatibility/2006">
+    <mc:Choice xmlns:p159="http://schemas.microsoft.com/office/powerpoint/2015/09/main" xmlns="" Requires="p159">
       <p:transition xmlns:p14="http://schemas.microsoft.com/office/powerpoint/2010/main" spd="slow" p14:dur="2000">
         <p159:morph option="byObject"/>
       </p:transition>
     </mc:Choice>
-    <mc:Fallback xmlns="">
+    <mc:Fallback>
       <p:transition spd="slow">
         <p:fade/>
       </p:transition>
@@ -15339,13 +15596,13 @@
   <p:clrMapOvr>
     <a:masterClrMapping/>
   </p:clrMapOvr>
-  <mc:AlternateContent xmlns:mc="http://schemas.openxmlformats.org/markup-compatibility/2006" xmlns:p159="http://schemas.microsoft.com/office/powerpoint/2015/09/main">
-    <mc:Choice Requires="p159">
+  <mc:AlternateContent xmlns:mc="http://schemas.openxmlformats.org/markup-compatibility/2006">
+    <mc:Choice xmlns:p159="http://schemas.microsoft.com/office/powerpoint/2015/09/main" xmlns="" Requires="p159">
       <p:transition xmlns:p14="http://schemas.microsoft.com/office/powerpoint/2010/main" spd="slow" p14:dur="2000">
         <p159:morph option="byObject"/>
       </p:transition>
     </mc:Choice>
-    <mc:Fallback xmlns="">
+    <mc:Fallback>
       <p:transition spd="slow">
         <p:fade/>
       </p:transition>
@@ -15418,20 +15675,25 @@
         <p:spPr/>
         <p:txBody>
           <a:bodyPr>
-            <a:normAutofit lnSpcReduction="10000"/>
+            <a:normAutofit/>
           </a:bodyPr>
           <a:lstStyle/>
           <a:p>
             <a:r>
               <a:rPr lang="hu-HU" dirty="0"/>
-              <a:t>A hotel foglalási és kezelési rendszer négy fő komponensből épül fel:</a:t>
-            </a:r>
-          </a:p>
-          <a:p>
-            <a:pPr>
-              <a:buFont typeface="Arial" panose="020B0604020202020204" pitchFamily="34" charset="0"/>
-              <a:buChar char="•"/>
-            </a:pPr>
+              <a:t>A hotel foglalási és kezelési </a:t>
+            </a:r>
+            <a:r>
+              <a:rPr lang="hu-HU" dirty="0" smtClean="0"/>
+              <a:t>rendszere </a:t>
+            </a:r>
+            <a:r>
+              <a:rPr lang="hu-HU" dirty="0"/>
+              <a:t>négy fő komponensből épül fel:</a:t>
+            </a:r>
+          </a:p>
+          <a:p>
+            <a:pPr lvl="1"/>
             <a:r>
               <a:rPr lang="hu-HU" b="1" dirty="0"/>
               <a:t>Backend</a:t>
@@ -15442,10 +15704,7 @@
             </a:r>
           </a:p>
           <a:p>
-            <a:pPr>
-              <a:buFont typeface="Arial" panose="020B0604020202020204" pitchFamily="34" charset="0"/>
-              <a:buChar char="•"/>
-            </a:pPr>
+            <a:pPr lvl="1"/>
             <a:r>
               <a:rPr lang="hu-HU" b="1" dirty="0"/>
               <a:t>Webes felület (Web UI)</a:t>
@@ -15456,10 +15715,7 @@
             </a:r>
           </a:p>
           <a:p>
-            <a:pPr>
-              <a:buFont typeface="Arial" panose="020B0604020202020204" pitchFamily="34" charset="0"/>
-              <a:buChar char="•"/>
-            </a:pPr>
+            <a:pPr lvl="1"/>
             <a:r>
               <a:rPr lang="hu-HU" b="1" dirty="0"/>
               <a:t>Asztali alkalmazás </a:t>
@@ -15470,17 +15726,18 @@
             </a:r>
           </a:p>
           <a:p>
-            <a:pPr>
-              <a:buFont typeface="Arial" panose="020B0604020202020204" pitchFamily="34" charset="0"/>
-              <a:buChar char="•"/>
-            </a:pPr>
-            <a:r>
-              <a:rPr lang="hu-HU" b="1" dirty="0"/>
+            <a:pPr lvl="1"/>
+            <a:r>
+              <a:rPr lang="hu-HU" b="1" dirty="0" smtClean="0"/>
               <a:t>Adatbázis</a:t>
             </a:r>
             <a:r>
+              <a:rPr lang="hu-HU" dirty="0" smtClean="0"/>
+              <a:t> </a:t>
+            </a:r>
+            <a:r>
               <a:rPr lang="hu-HU" dirty="0"/>
-              <a:t> – SQL Server</a:t>
+              <a:t>– SQL Server</a:t>
             </a:r>
           </a:p>
           <a:p>
@@ -15501,18 +15758,25 @@
   <p:clrMapOvr>
     <a:masterClrMapping/>
   </p:clrMapOvr>
-  <mc:AlternateContent xmlns:mc="http://schemas.openxmlformats.org/markup-compatibility/2006" xmlns:p159="http://schemas.microsoft.com/office/powerpoint/2015/09/main">
-    <mc:Choice Requires="p159">
+  <mc:AlternateContent xmlns:mc="http://schemas.openxmlformats.org/markup-compatibility/2006">
+    <mc:Choice xmlns:p159="http://schemas.microsoft.com/office/powerpoint/2015/09/main" xmlns="" Requires="p159">
       <p:transition xmlns:p14="http://schemas.microsoft.com/office/powerpoint/2010/main" spd="slow" p14:dur="2000">
         <p159:morph option="byObject"/>
       </p:transition>
     </mc:Choice>
-    <mc:Fallback xmlns="">
+    <mc:Fallback>
       <p:transition spd="slow">
         <p:fade/>
       </p:transition>
     </mc:Fallback>
   </mc:AlternateContent>
+  <p:timing>
+    <p:tnLst>
+      <p:par>
+        <p:cTn id="1" dur="indefinite" restart="never" nodeType="tmRoot"/>
+      </p:par>
+    </p:tnLst>
+  </p:timing>
 </p:sld>
 </file>
 
@@ -15646,18 +15910,25 @@
   <p:clrMapOvr>
     <a:masterClrMapping/>
   </p:clrMapOvr>
-  <mc:AlternateContent xmlns:mc="http://schemas.openxmlformats.org/markup-compatibility/2006" xmlns:p159="http://schemas.microsoft.com/office/powerpoint/2015/09/main">
-    <mc:Choice Requires="p159">
+  <mc:AlternateContent xmlns:mc="http://schemas.openxmlformats.org/markup-compatibility/2006">
+    <mc:Choice xmlns:p159="http://schemas.microsoft.com/office/powerpoint/2015/09/main" xmlns="" Requires="p159">
       <p:transition xmlns:p14="http://schemas.microsoft.com/office/powerpoint/2010/main" spd="slow" p14:dur="2000">
         <p159:morph option="byObject"/>
       </p:transition>
     </mc:Choice>
-    <mc:Fallback xmlns="">
+    <mc:Fallback>
       <p:transition spd="slow">
         <p:fade/>
       </p:transition>
     </mc:Fallback>
   </mc:AlternateContent>
+  <p:timing>
+    <p:tnLst>
+      <p:par>
+        <p:cTn id="1" dur="indefinite" restart="never" nodeType="tmRoot"/>
+      </p:par>
+    </p:tnLst>
+  </p:timing>
 </p:sld>
 </file>
 
@@ -15782,18 +16053,25 @@
   <p:clrMapOvr>
     <a:masterClrMapping/>
   </p:clrMapOvr>
-  <mc:AlternateContent xmlns:mc="http://schemas.openxmlformats.org/markup-compatibility/2006" xmlns:p159="http://schemas.microsoft.com/office/powerpoint/2015/09/main">
-    <mc:Choice Requires="p159">
+  <mc:AlternateContent xmlns:mc="http://schemas.openxmlformats.org/markup-compatibility/2006">
+    <mc:Choice xmlns:p159="http://schemas.microsoft.com/office/powerpoint/2015/09/main" xmlns="" Requires="p159">
       <p:transition xmlns:p14="http://schemas.microsoft.com/office/powerpoint/2010/main" spd="slow" p14:dur="2000">
         <p159:morph option="byObject"/>
       </p:transition>
     </mc:Choice>
-    <mc:Fallback xmlns="">
+    <mc:Fallback>
       <p:transition spd="slow">
         <p:fade/>
       </p:transition>
     </mc:Fallback>
   </mc:AlternateContent>
+  <p:timing>
+    <p:tnLst>
+      <p:par>
+        <p:cTn id="1" dur="indefinite" restart="never" nodeType="tmRoot"/>
+      </p:par>
+    </p:tnLst>
+  </p:timing>
 </p:sld>
 </file>
 
@@ -15864,8 +16142,12 @@
           <a:lstStyle/>
           <a:p>
             <a:r>
+              <a:rPr lang="hu-HU" dirty="0" smtClean="0"/>
+              <a:t>Egyszerű </a:t>
+            </a:r>
+            <a:r>
               <a:rPr lang="hu-HU" dirty="0"/>
-              <a:t>Érintésbarát kezelőfelület</a:t>
+              <a:t>kezelőfelület</a:t>
             </a:r>
           </a:p>
           <a:p>
@@ -15898,8 +16180,21 @@
             <a:pPr lvl="1"/>
             <a:r>
               <a:rPr lang="hu-HU" dirty="0"/>
-              <a:t>Az alkalmazás teljes egészében egységes designt kapott, így ugyanaz a felület fogad minket a használatakor</a:t>
-            </a:r>
+              <a:t>Az alkalmazás teljes egészében egységes designt kapott, így ugyanaz a felület fogad minket a </a:t>
+            </a:r>
+            <a:r>
+              <a:rPr lang="hu-HU" dirty="0" smtClean="0"/>
+              <a:t>különböző </a:t>
+            </a:r>
+            <a:r>
+              <a:rPr lang="hu-HU" dirty="0" err="1" smtClean="0"/>
+              <a:t>funckiók</a:t>
+            </a:r>
+            <a:r>
+              <a:rPr lang="hu-HU" dirty="0" smtClean="0"/>
+              <a:t> használatakor.</a:t>
+            </a:r>
+            <a:endParaRPr lang="hu-HU" dirty="0"/>
           </a:p>
         </p:txBody>
       </p:sp>
@@ -15913,13 +16208,13 @@
   <p:clrMapOvr>
     <a:masterClrMapping/>
   </p:clrMapOvr>
-  <mc:AlternateContent xmlns:mc="http://schemas.openxmlformats.org/markup-compatibility/2006" xmlns:p159="http://schemas.microsoft.com/office/powerpoint/2015/09/main">
-    <mc:Choice Requires="p159">
+  <mc:AlternateContent xmlns:mc="http://schemas.openxmlformats.org/markup-compatibility/2006">
+    <mc:Choice xmlns:p159="http://schemas.microsoft.com/office/powerpoint/2015/09/main" xmlns="" Requires="p159">
       <p:transition xmlns:p14="http://schemas.microsoft.com/office/powerpoint/2010/main" spd="slow" p14:dur="2000">
         <p159:morph option="byObject"/>
       </p:transition>
     </mc:Choice>
-    <mc:Fallback xmlns="">
+    <mc:Fallback>
       <p:transition spd="slow">
         <p:fade/>
       </p:transition>
@@ -16044,13 +16339,13 @@
   <p:clrMapOvr>
     <a:masterClrMapping/>
   </p:clrMapOvr>
-  <mc:AlternateContent xmlns:mc="http://schemas.openxmlformats.org/markup-compatibility/2006" xmlns:p159="http://schemas.microsoft.com/office/powerpoint/2015/09/main">
-    <mc:Choice Requires="p159">
+  <mc:AlternateContent xmlns:mc="http://schemas.openxmlformats.org/markup-compatibility/2006">
+    <mc:Choice xmlns:p159="http://schemas.microsoft.com/office/powerpoint/2015/09/main" xmlns="" Requires="p159">
       <p:transition xmlns:p14="http://schemas.microsoft.com/office/powerpoint/2010/main" spd="slow" p14:dur="2000">
         <p159:morph option="byObject"/>
       </p:transition>
     </mc:Choice>
-    <mc:Fallback xmlns="">
+    <mc:Fallback>
       <p:transition spd="slow">
         <p:fade/>
       </p:transition>
@@ -16105,8 +16400,13 @@
             <a:pPr algn="ctr"/>
             <a:r>
               <a:rPr lang="hu-HU" dirty="0"/>
-              <a:t>Főbb funkciók és kiemelkedő megoldások =&gt;</a:t>
-            </a:r>
+              <a:t>Főbb funkciók és kiemelkedő </a:t>
+            </a:r>
+            <a:r>
+              <a:rPr lang="hu-HU" dirty="0" smtClean="0"/>
+              <a:t>megoldások</a:t>
+            </a:r>
+            <a:endParaRPr lang="hu-HU" dirty="0"/>
           </a:p>
         </p:txBody>
       </p:sp>
@@ -16120,13 +16420,13 @@
   <p:clrMapOvr>
     <a:masterClrMapping/>
   </p:clrMapOvr>
-  <mc:AlternateContent xmlns:mc="http://schemas.openxmlformats.org/markup-compatibility/2006" xmlns:p159="http://schemas.microsoft.com/office/powerpoint/2015/09/main">
-    <mc:Choice Requires="p159">
+  <mc:AlternateContent xmlns:mc="http://schemas.openxmlformats.org/markup-compatibility/2006">
+    <mc:Choice xmlns:p159="http://schemas.microsoft.com/office/powerpoint/2015/09/main" xmlns="" Requires="p159">
       <p:transition xmlns:p14="http://schemas.microsoft.com/office/powerpoint/2010/main" spd="slow" p14:dur="2000">
         <p159:morph option="byObject"/>
       </p:transition>
     </mc:Choice>
-    <mc:Fallback xmlns="">
+    <mc:Fallback>
       <p:transition spd="slow">
         <p:fade/>
       </p:transition>
@@ -16239,8 +16539,21 @@
           <a:p>
             <a:r>
               <a:rPr lang="hu-HU" sz="3200" dirty="0"/>
-              <a:t>A tesztelés során ezen a felületen keresztül kezeltük és teszteltük az API-végpontokat</a:t>
-            </a:r>
+              <a:t>A tesztelés során ezen a felületen keresztül kezeltük és </a:t>
+            </a:r>
+            <a:r>
+              <a:rPr lang="hu-HU" sz="3200" dirty="0" smtClean="0"/>
+              <a:t>vizsgáltuk </a:t>
+            </a:r>
+            <a:r>
+              <a:rPr lang="hu-HU" sz="3200" dirty="0"/>
+              <a:t>az </a:t>
+            </a:r>
+            <a:r>
+              <a:rPr lang="hu-HU" sz="3200" dirty="0" smtClean="0"/>
+              <a:t>API-végpontokat.</a:t>
+            </a:r>
+            <a:endParaRPr lang="hu-HU" sz="3200" dirty="0"/>
           </a:p>
         </p:txBody>
       </p:sp>
@@ -16254,18 +16567,25 @@
   <p:clrMapOvr>
     <a:masterClrMapping/>
   </p:clrMapOvr>
-  <mc:AlternateContent xmlns:mc="http://schemas.openxmlformats.org/markup-compatibility/2006" xmlns:p159="http://schemas.microsoft.com/office/powerpoint/2015/09/main">
-    <mc:Choice Requires="p159">
+  <mc:AlternateContent xmlns:mc="http://schemas.openxmlformats.org/markup-compatibility/2006">
+    <mc:Choice xmlns:p159="http://schemas.microsoft.com/office/powerpoint/2015/09/main" xmlns="" Requires="p159">
       <p:transition xmlns:p14="http://schemas.microsoft.com/office/powerpoint/2010/main" spd="slow" p14:dur="2000">
         <p159:morph option="byObject"/>
       </p:transition>
     </mc:Choice>
-    <mc:Fallback xmlns="">
+    <mc:Fallback>
       <p:transition spd="slow">
         <p:fade/>
       </p:transition>
     </mc:Fallback>
   </mc:AlternateContent>
+  <p:timing>
+    <p:tnLst>
+      <p:par>
+        <p:cTn id="1" dur="indefinite" restart="never" nodeType="tmRoot"/>
+      </p:par>
+    </p:tnLst>
+  </p:timing>
 </p:sld>
 </file>
 
